--- a/FINAL/ppt/FINAL_presentation.pptx
+++ b/FINAL/ppt/FINAL_presentation.pptx
@@ -10,6 +10,7 @@
   <p:sldIdLst>
     <p:sldId id="256" r:id="rId2"/>
     <p:sldId id="257" r:id="rId3"/>
+    <p:sldId id="260" r:id="rId11"/>
     <p:sldId id="258" r:id="rId4"/>
     <p:sldId id="259" r:id="rId5"/>
   </p:sldIdLst>
@@ -507,8 +508,8 @@
         </p:nvSpPr>
         <p:spPr>
           <a:xfrm>
-            <a:off x="685800" y="857250"/>
-            <a:ext cx="5486400" cy="2314575"/>
+            <a:off x="1371600" y="857250"/>
+            <a:ext cx="4114800" cy="2314575"/>
           </a:xfrm>
           <a:custGeom>
             <a:avLst/>
@@ -6210,6 +6211,2858 @@
 </file>
 
 <file path=ppt/slides/slide3.xml><?xml version="1.0" encoding="utf-8"?>
+<p:sld xmlns:a="http://schemas.openxmlformats.org/drawingml/2006/main" xmlns:p="http://schemas.openxmlformats.org/presentationml/2006/main" xmlns:r="http://schemas.openxmlformats.org/officeDocument/2006/relationships">
+  <p:cSld>
+    <p:spTree>
+      <p:nvGrpSpPr>
+        <p:cNvPr id="1" name=""/>
+        <p:cNvGrpSpPr/>
+        <p:nvPr/>
+      </p:nvGrpSpPr>
+      <p:grpSpPr/>
+      <p:sp>
+        <p:nvSpPr>
+          <p:cNvPr id="120" name="text"/>
+          <p:cNvSpPr txBox="1"/>
+          <p:nvPr/>
+        </p:nvSpPr>
+        <p:spPr>
+          <a:xfrm>
+            <a:off x="12435840" y="201168"/>
+            <a:ext cx="5486400" cy="274320"/>
+          </a:xfrm>
+          <a:prstGeom prst="rect">
+            <a:avLst/>
+          </a:prstGeom>
+          <a:noFill/>
+          <a:ln>
+            <a:noFill/>
+          </a:ln>
+        </p:spPr>
+        <p:txBody>
+          <a:bodyPr wrap="square" lIns="0" tIns="0" rIns="0" bIns="0" rtlCol="0" anchor="t">
+            <a:noAutofit/>
+          </a:bodyPr>
+          <a:lstStyle/>
+          <a:p>
+            <a:pPr algn="r">
+              <a:lnSpc>
+                <a:spcPct val="100000"/>
+              </a:lnSpc>
+              <a:spcBef>
+                <a:spcPts val="0"/>
+              </a:spcBef>
+              <a:buNone/>
+            </a:pPr>
+            <a:r>
+              <a:rPr lang="ko-KR" altLang="en-US" sz="1400" dirty="0">
+                <a:solidFill>
+                  <a:srgbClr val="8C8C8C"/>
+                </a:solidFill>
+                <a:latin typeface="Malgun Gothic"/>
+                <a:ea typeface="Malgun Gothic"/>
+                <a:cs typeface="Malgun Gothic"/>
+              </a:rPr>
+              <a:t>STOPWATCH · SENSOR · UART</a:t>
+            </a:r>
+            <a:endParaRPr lang="ko-KR" sz="1400" dirty="0"/>
+          </a:p>
+        </p:txBody>
+      </p:sp>
+      <p:sp>
+        <p:nvSpPr>
+          <p:cNvPr id="121" name="shape"/>
+          <p:cNvSpPr/>
+          <p:nvPr/>
+        </p:nvSpPr>
+        <p:spPr>
+          <a:xfrm>
+            <a:off x="841248" y="548640"/>
+            <a:ext cx="146304" cy="146304"/>
+          </a:xfrm>
+          <a:prstGeom prst="ellipse">
+            <a:avLst/>
+          </a:prstGeom>
+          <a:solidFill>
+            <a:srgbClr val="404040"/>
+          </a:solidFill>
+          <a:ln>
+            <a:noFill/>
+          </a:ln>
+        </p:spPr>
+        <p:txBody>
+          <a:bodyPr/>
+          <a:lstStyle/>
+          <a:p>
+            <a:endParaRPr lang="ko-KR" altLang="en-US"/>
+          </a:p>
+        </p:txBody>
+      </p:sp>
+      <p:sp>
+        <p:nvSpPr>
+          <p:cNvPr id="122" name="text"/>
+          <p:cNvSpPr txBox="1"/>
+          <p:nvPr/>
+        </p:nvSpPr>
+        <p:spPr>
+          <a:xfrm>
+            <a:off x="1078992" y="420624"/>
+            <a:ext cx="9144000" cy="384048"/>
+          </a:xfrm>
+          <a:prstGeom prst="rect">
+            <a:avLst/>
+          </a:prstGeom>
+          <a:noFill/>
+          <a:ln>
+            <a:noFill/>
+          </a:ln>
+        </p:spPr>
+        <p:txBody>
+          <a:bodyPr wrap="square" lIns="0" tIns="0" rIns="0" bIns="0" rtlCol="0" anchor="t">
+            <a:noAutofit/>
+          </a:bodyPr>
+          <a:lstStyle/>
+          <a:p>
+            <a:pPr algn="l">
+              <a:lnSpc>
+                <a:spcPct val="100000"/>
+              </a:lnSpc>
+              <a:spcBef>
+                <a:spcPts val="0"/>
+              </a:spcBef>
+              <a:buNone/>
+            </a:pPr>
+            <a:r>
+              <a:rPr lang="ko-KR" altLang="en-US" sz="1600" b="1" dirty="0">
+                <a:solidFill>
+                  <a:srgbClr val="404040"/>
+                </a:solidFill>
+                <a:latin typeface="Malgun Gothic"/>
+                <a:ea typeface="Malgun Gothic"/>
+                <a:cs typeface="Malgun Gothic"/>
+              </a:rPr>
+              <a:t>01  프로젝트 개요</a:t>
+            </a:r>
+            <a:endParaRPr lang="ko-KR" sz="1250" dirty="0"/>
+          </a:p>
+        </p:txBody>
+      </p:sp>
+      <p:sp>
+        <p:nvSpPr>
+          <p:cNvPr id="123" name="text"/>
+          <p:cNvSpPr txBox="1"/>
+          <p:nvPr/>
+        </p:nvSpPr>
+        <p:spPr>
+          <a:xfrm>
+            <a:off x="841248" y="786384"/>
+            <a:ext cx="16642080" cy="777240"/>
+          </a:xfrm>
+          <a:prstGeom prst="rect">
+            <a:avLst/>
+          </a:prstGeom>
+          <a:noFill/>
+          <a:ln>
+            <a:noFill/>
+          </a:ln>
+        </p:spPr>
+        <p:txBody>
+          <a:bodyPr wrap="square" lIns="0" tIns="0" rIns="0" bIns="0" rtlCol="0" anchor="ctr">
+            <a:noAutofit/>
+          </a:bodyPr>
+          <a:lstStyle/>
+          <a:p>
+            <a:pPr algn="l">
+              <a:lnSpc>
+                <a:spcPct val="100000"/>
+              </a:lnSpc>
+              <a:spcBef>
+                <a:spcPts val="0"/>
+              </a:spcBef>
+              <a:buNone/>
+            </a:pPr>
+            <a:r>
+              <a:rPr lang="ko-KR" altLang="en-US" sz="4000" dirty="0">
+                <a:solidFill>
+                  <a:srgbClr val="262626"/>
+                </a:solidFill>
+                <a:latin typeface="Malgun Gothic Semilight"/>
+                <a:ea typeface="Malgun Gothic Semilight"/>
+                <a:cs typeface="Malgun Gothic Semilight"/>
+              </a:rPr>
+              <a:t>시스템 스펙</a:t>
+            </a:r>
+            <a:endParaRPr lang="ko-KR" sz="3000" dirty="0"/>
+          </a:p>
+        </p:txBody>
+      </p:sp>
+      <p:sp>
+        <p:nvSpPr>
+          <p:cNvPr id="124" name="chip"/>
+          <p:cNvSpPr/>
+          <p:nvPr/>
+        </p:nvSpPr>
+        <p:spPr>
+          <a:xfrm>
+            <a:off x="841248" y="1700784"/>
+            <a:ext cx="1097280" cy="475488"/>
+          </a:xfrm>
+          <a:prstGeom prst="roundRect">
+            <a:avLst>
+              <a:gd name="adj" fmla="val 50000"/>
+            </a:avLst>
+          </a:prstGeom>
+          <a:solidFill>
+            <a:srgbClr val="C00000"/>
+          </a:solidFill>
+          <a:ln>
+            <a:noFill/>
+          </a:ln>
+        </p:spPr>
+        <p:txBody>
+          <a:bodyPr wrap="square" lIns="0" tIns="0" rIns="0" bIns="0" rtlCol="0" anchor="ctr">
+            <a:noAutofit/>
+          </a:bodyPr>
+          <a:lstStyle/>
+          <a:p>
+            <a:pPr algn="ctr">
+              <a:lnSpc>
+                <a:spcPct val="100000"/>
+              </a:lnSpc>
+              <a:spcBef>
+                <a:spcPts val="0"/>
+              </a:spcBef>
+              <a:buNone/>
+            </a:pPr>
+            <a:r>
+              <a:rPr lang="ko-KR" altLang="en-US" sz="1800" b="1" dirty="0">
+                <a:solidFill>
+                  <a:srgbClr val="FFFFFF"/>
+                </a:solidFill>
+                <a:latin typeface="Malgun Gothic"/>
+                <a:ea typeface="Malgun Gothic"/>
+                <a:cs typeface="Malgun Gothic"/>
+              </a:rPr>
+              <a:t>요약</a:t>
+            </a:r>
+            <a:endParaRPr lang="ko-KR" sz="1400" dirty="0"/>
+          </a:p>
+        </p:txBody>
+      </p:sp>
+      <p:sp>
+        <p:nvSpPr>
+          <p:cNvPr id="125" name="text"/>
+          <p:cNvSpPr txBox="1"/>
+          <p:nvPr/>
+        </p:nvSpPr>
+        <p:spPr>
+          <a:xfrm>
+            <a:off x="2103120" y="1645920"/>
+            <a:ext cx="15453359" cy="585216"/>
+          </a:xfrm>
+          <a:prstGeom prst="rect">
+            <a:avLst/>
+          </a:prstGeom>
+          <a:noFill/>
+          <a:ln>
+            <a:noFill/>
+          </a:ln>
+        </p:spPr>
+        <p:txBody>
+          <a:bodyPr wrap="square" lIns="0" tIns="0" rIns="0" bIns="0" rtlCol="0" anchor="ctr">
+            <a:noAutofit/>
+          </a:bodyPr>
+          <a:lstStyle/>
+          <a:p>
+            <a:pPr algn="l">
+              <a:lnSpc>
+                <a:spcPct val="100000"/>
+              </a:lnSpc>
+              <a:spcBef>
+                <a:spcPts val="0"/>
+              </a:spcBef>
+              <a:buNone/>
+            </a:pPr>
+            <a:r>
+              <a:rPr lang="ko-KR" altLang="en-US" sz="2400" b="1" dirty="0">
+                <a:solidFill>
+                  <a:srgbClr val="262626"/>
+                </a:solidFill>
+                <a:latin typeface="Malgun Gothic"/>
+                <a:ea typeface="Malgun Gothic"/>
+                <a:cs typeface="Malgun Gothic"/>
+              </a:rPr>
+              <a:t>100 MHz FPGA 하나에 PC (UART) · 센서 2 종 연결 — LUT 7.2 % · WNS +0.320 ns 로 타이밍 위반 0</a:t>
+            </a:r>
+            <a:endParaRPr lang="ko-KR" sz="1900" dirty="0"/>
+          </a:p>
+        </p:txBody>
+      </p:sp>
+      <p:sp>
+        <p:nvSpPr>
+          <p:cNvPr id="126" name="text"/>
+          <p:cNvSpPr txBox="1"/>
+          <p:nvPr/>
+        </p:nvSpPr>
+        <p:spPr>
+          <a:xfrm>
+            <a:off x="16642080" y="9710928"/>
+            <a:ext cx="822960" cy="347472"/>
+          </a:xfrm>
+          <a:prstGeom prst="rect">
+            <a:avLst/>
+          </a:prstGeom>
+          <a:noFill/>
+          <a:ln>
+            <a:noFill/>
+          </a:ln>
+        </p:spPr>
+        <p:txBody>
+          <a:bodyPr wrap="square" lIns="0" tIns="0" rIns="0" bIns="0" rtlCol="0" anchor="t">
+            <a:noAutofit/>
+          </a:bodyPr>
+          <a:lstStyle/>
+          <a:p>
+            <a:pPr algn="r">
+              <a:lnSpc>
+                <a:spcPct val="100000"/>
+              </a:lnSpc>
+              <a:spcBef>
+                <a:spcPts val="0"/>
+              </a:spcBef>
+              <a:buNone/>
+            </a:pPr>
+            <a:r>
+              <a:rPr lang="ko-KR" altLang="en-US" sz="1400" dirty="0">
+                <a:solidFill>
+                  <a:srgbClr val="8C8C8C"/>
+                </a:solidFill>
+                <a:latin typeface="Malgun Gothic"/>
+                <a:ea typeface="Malgun Gothic"/>
+                <a:cs typeface="Malgun Gothic"/>
+              </a:rPr>
+              <a:t>03</a:t>
+            </a:r>
+            <a:endParaRPr lang="ko-KR" sz="1100" dirty="0"/>
+          </a:p>
+        </p:txBody>
+      </p:sp>
+      <p:sp>
+        <p:nvSpPr>
+          <p:cNvPr id="127" name="Rounded Rectangle 126"/>
+          <p:cNvSpPr/>
+          <p:nvPr/>
+        </p:nvSpPr>
+        <p:spPr>
+          <a:xfrm>
+            <a:off x="6172200" y="2423160"/>
+            <a:ext cx="6309360" cy="5897880"/>
+          </a:xfrm>
+          <a:prstGeom prst="roundRect">
+            <a:avLst>
+              <a:gd name="adj" fmla="val 4000"/>
+            </a:avLst>
+          </a:prstGeom>
+          <a:noFill/>
+          <a:ln w="31750">
+            <a:solidFill>
+              <a:srgbClr val="404040"/>
+            </a:solidFill>
+          </a:ln>
+          <a:effectLst/>
+        </p:spPr>
+        <p:style>
+          <a:lnRef idx="1">
+            <a:schemeClr val="accent1"/>
+          </a:lnRef>
+          <a:fillRef idx="3">
+            <a:schemeClr val="accent1"/>
+          </a:fillRef>
+          <a:effectRef idx="2">
+            <a:schemeClr val="accent1"/>
+          </a:effectRef>
+          <a:fontRef idx="minor">
+            <a:schemeClr val="lt1"/>
+          </a:fontRef>
+        </p:style>
+        <p:txBody>
+          <a:bodyPr rtlCol="0" anchor="ctr"/>
+          <a:lstStyle/>
+          <a:p>
+            <a:pPr algn="ctr"/>
+          </a:p>
+        </p:txBody>
+      </p:sp>
+      <p:sp>
+        <p:nvSpPr>
+          <p:cNvPr id="128" name="TextBox 127"/>
+          <p:cNvSpPr txBox="1"/>
+          <p:nvPr/>
+        </p:nvSpPr>
+        <p:spPr>
+          <a:xfrm>
+            <a:off x="6400800" y="2514600"/>
+            <a:ext cx="5852160" cy="411480"/>
+          </a:xfrm>
+          <a:prstGeom prst="rect">
+            <a:avLst/>
+          </a:prstGeom>
+          <a:noFill/>
+        </p:spPr>
+        <p:txBody>
+          <a:bodyPr wrap="square" anchor="ctr" lIns="0" rIns="0" tIns="0" bIns="0">
+            <a:spAutoFit/>
+          </a:bodyPr>
+          <a:lstStyle/>
+          <a:p>
+            <a:pPr algn="l"/>
+            <a:r>
+              <a:rPr sz="1800" b="1">
+                <a:solidFill>
+                  <a:srgbClr val="262626"/>
+                </a:solidFill>
+                <a:latin typeface="Malgun Gothic"/>
+                <a:ea typeface="Malgun Gothic"/>
+                <a:cs typeface="Malgun Gothic"/>
+              </a:rPr>
+              <a:t>FPGA</a:t>
+            </a:r>
+            <a:r>
+              <a:rPr sz="1400" b="0">
+                <a:solidFill>
+                  <a:srgbClr val="595959"/>
+                </a:solidFill>
+                <a:latin typeface="Malgun Gothic"/>
+                <a:ea typeface="Malgun Gothic"/>
+                <a:cs typeface="Malgun Gothic"/>
+              </a:rPr>
+              <a:t>   Basys3 · Artix-7 XC7A35T</a:t>
+            </a:r>
+          </a:p>
+        </p:txBody>
+      </p:sp>
+      <p:sp>
+        <p:nvSpPr>
+          <p:cNvPr id="129" name="Rounded Rectangle 128"/>
+          <p:cNvSpPr/>
+          <p:nvPr/>
+        </p:nvSpPr>
+        <p:spPr>
+          <a:xfrm>
+            <a:off x="6355080" y="3017520"/>
+            <a:ext cx="5943600" cy="1188720"/>
+          </a:xfrm>
+          <a:prstGeom prst="roundRect">
+            <a:avLst>
+              <a:gd name="adj" fmla="val 12000"/>
+            </a:avLst>
+          </a:prstGeom>
+          <a:solidFill>
+            <a:srgbClr val="F4F4F4"/>
+          </a:solidFill>
+          <a:ln>
+            <a:noFill/>
+          </a:ln>
+          <a:effectLst/>
+        </p:spPr>
+        <p:style>
+          <a:lnRef idx="1">
+            <a:schemeClr val="accent1"/>
+          </a:lnRef>
+          <a:fillRef idx="3">
+            <a:schemeClr val="accent1"/>
+          </a:fillRef>
+          <a:effectRef idx="2">
+            <a:schemeClr val="accent1"/>
+          </a:effectRef>
+          <a:fontRef idx="minor">
+            <a:schemeClr val="lt1"/>
+          </a:fontRef>
+        </p:style>
+        <p:txBody>
+          <a:bodyPr rtlCol="0" anchor="ctr" wrap="square" lIns="0" rIns="0" tIns="0" bIns="0"/>
+          <a:lstStyle/>
+          <a:p>
+            <a:pPr algn="l"/>
+            <a:r>
+              <a:rPr sz="1000" b="0">
+                <a:solidFill>
+                  <a:srgbClr val="262626"/>
+                </a:solidFill>
+                <a:latin typeface="Malgun Gothic"/>
+                <a:ea typeface="Malgun Gothic"/>
+                <a:cs typeface="Malgun Gothic"/>
+              </a:rPr>
+              <a:t/>
+            </a:r>
+          </a:p>
+        </p:txBody>
+      </p:sp>
+      <p:sp>
+        <p:nvSpPr>
+          <p:cNvPr id="130" name="Oval 129"/>
+          <p:cNvSpPr/>
+          <p:nvPr/>
+        </p:nvSpPr>
+        <p:spPr>
+          <a:xfrm>
+            <a:off x="6492240" y="3145536"/>
+            <a:ext cx="420624" cy="420624"/>
+          </a:xfrm>
+          <a:prstGeom prst="ellipse">
+            <a:avLst/>
+          </a:prstGeom>
+          <a:solidFill>
+            <a:srgbClr val="404040"/>
+          </a:solidFill>
+          <a:ln>
+            <a:noFill/>
+          </a:ln>
+          <a:effectLst/>
+        </p:spPr>
+        <p:style>
+          <a:lnRef idx="1">
+            <a:schemeClr val="accent1"/>
+          </a:lnRef>
+          <a:fillRef idx="3">
+            <a:schemeClr val="accent1"/>
+          </a:fillRef>
+          <a:effectRef idx="2">
+            <a:schemeClr val="accent1"/>
+          </a:effectRef>
+          <a:fontRef idx="minor">
+            <a:schemeClr val="lt1"/>
+          </a:fontRef>
+        </p:style>
+        <p:txBody>
+          <a:bodyPr rtlCol="0" anchor="ctr" wrap="square" lIns="0" rIns="0" tIns="0" bIns="0"/>
+          <a:lstStyle/>
+          <a:p>
+            <a:pPr algn="ctr"/>
+            <a:r>
+              <a:rPr sz="1600" b="1">
+                <a:solidFill>
+                  <a:srgbClr val="FFFFFF"/>
+                </a:solidFill>
+                <a:latin typeface="Malgun Gothic"/>
+                <a:ea typeface="Malgun Gothic"/>
+                <a:cs typeface="Malgun Gothic"/>
+              </a:rPr>
+              <a:t>1</a:t>
+            </a:r>
+          </a:p>
+        </p:txBody>
+      </p:sp>
+      <p:sp>
+        <p:nvSpPr>
+          <p:cNvPr id="131" name="TextBox 130"/>
+          <p:cNvSpPr txBox="1"/>
+          <p:nvPr/>
+        </p:nvSpPr>
+        <p:spPr>
+          <a:xfrm>
+            <a:off x="7040880" y="3127248"/>
+            <a:ext cx="3566160" cy="411480"/>
+          </a:xfrm>
+          <a:prstGeom prst="rect">
+            <a:avLst/>
+          </a:prstGeom>
+          <a:noFill/>
+        </p:spPr>
+        <p:txBody>
+          <a:bodyPr wrap="square" anchor="ctr" lIns="0" rIns="0" tIns="0" bIns="0">
+            <a:spAutoFit/>
+          </a:bodyPr>
+          <a:lstStyle/>
+          <a:p>
+            <a:pPr algn="l"/>
+            <a:r>
+              <a:rPr sz="1700" b="1">
+                <a:solidFill>
+                  <a:srgbClr val="262626"/>
+                </a:solidFill>
+                <a:latin typeface="Malgun Gothic"/>
+                <a:ea typeface="Malgun Gothic"/>
+                <a:cs typeface="Malgun Gothic"/>
+              </a:rPr>
+              <a:t>클럭 · 리셋</a:t>
+            </a:r>
+          </a:p>
+        </p:txBody>
+      </p:sp>
+      <p:sp>
+        <p:nvSpPr>
+          <p:cNvPr id="132" name="TextBox 131"/>
+          <p:cNvSpPr txBox="1"/>
+          <p:nvPr/>
+        </p:nvSpPr>
+        <p:spPr>
+          <a:xfrm>
+            <a:off x="7040880" y="3547872"/>
+            <a:ext cx="3611880" cy="585216"/>
+          </a:xfrm>
+          <a:prstGeom prst="rect">
+            <a:avLst/>
+          </a:prstGeom>
+          <a:noFill/>
+        </p:spPr>
+        <p:txBody>
+          <a:bodyPr wrap="square" anchor="t" lIns="0" rIns="0" tIns="0" bIns="0">
+            <a:spAutoFit/>
+          </a:bodyPr>
+          <a:lstStyle/>
+          <a:p>
+            <a:pPr algn="l"/>
+            <a:r>
+              <a:rPr sz="1400" b="0">
+                <a:solidFill>
+                  <a:srgbClr val="595959"/>
+                </a:solidFill>
+                <a:latin typeface="Malgun Gothic"/>
+                <a:ea typeface="Malgun Gothic"/>
+                <a:cs typeface="Malgun Gothic"/>
+              </a:rPr>
+              <a:t>W5 단일 클럭 · btnC 리셋</a:t>
+            </a:r>
+          </a:p>
+          <a:p>
+            <a:pPr algn="l"/>
+            <a:r>
+              <a:rPr sz="1400" b="0">
+                <a:solidFill>
+                  <a:srgbClr val="595959"/>
+                </a:solidFill>
+                <a:latin typeface="Malgun Gothic"/>
+                <a:ea typeface="Malgun Gothic"/>
+                <a:cs typeface="Malgun Gothic"/>
+              </a:rPr>
+              <a:t>reset_sync 하나로 동기 해제</a:t>
+            </a:r>
+          </a:p>
+        </p:txBody>
+      </p:sp>
+      <p:sp>
+        <p:nvSpPr>
+          <p:cNvPr id="133" name="TextBox 132"/>
+          <p:cNvSpPr txBox="1"/>
+          <p:nvPr/>
+        </p:nvSpPr>
+        <p:spPr>
+          <a:xfrm>
+            <a:off x="10378440" y="3200400"/>
+            <a:ext cx="1828800" cy="502920"/>
+          </a:xfrm>
+          <a:prstGeom prst="rect">
+            <a:avLst/>
+          </a:prstGeom>
+          <a:noFill/>
+        </p:spPr>
+        <p:txBody>
+          <a:bodyPr wrap="square" anchor="ctr" lIns="0" rIns="0" tIns="0" bIns="0">
+            <a:spAutoFit/>
+          </a:bodyPr>
+          <a:lstStyle/>
+          <a:p>
+            <a:pPr algn="r"/>
+            <a:r>
+              <a:rPr sz="2400" b="1">
+                <a:solidFill>
+                  <a:srgbClr val="262626"/>
+                </a:solidFill>
+                <a:latin typeface="Malgun Gothic"/>
+                <a:ea typeface="Malgun Gothic"/>
+                <a:cs typeface="Malgun Gothic"/>
+              </a:rPr>
+              <a:t>100 MHz</a:t>
+            </a:r>
+          </a:p>
+        </p:txBody>
+      </p:sp>
+      <p:sp>
+        <p:nvSpPr>
+          <p:cNvPr id="134" name="TextBox 133"/>
+          <p:cNvSpPr txBox="1"/>
+          <p:nvPr/>
+        </p:nvSpPr>
+        <p:spPr>
+          <a:xfrm>
+            <a:off x="10378440" y="3730752"/>
+            <a:ext cx="1828800" cy="320040"/>
+          </a:xfrm>
+          <a:prstGeom prst="rect">
+            <a:avLst/>
+          </a:prstGeom>
+          <a:noFill/>
+        </p:spPr>
+        <p:txBody>
+          <a:bodyPr wrap="square" anchor="ctr" lIns="0" rIns="0" tIns="0" bIns="0">
+            <a:spAutoFit/>
+          </a:bodyPr>
+          <a:lstStyle/>
+          <a:p>
+            <a:pPr algn="r"/>
+            <a:r>
+              <a:rPr sz="1300" b="0">
+                <a:solidFill>
+                  <a:srgbClr val="595959"/>
+                </a:solidFill>
+                <a:latin typeface="Malgun Gothic"/>
+                <a:ea typeface="Malgun Gothic"/>
+                <a:cs typeface="Malgun Gothic"/>
+              </a:rPr>
+              <a:t>단일 클럭</a:t>
+            </a:r>
+          </a:p>
+        </p:txBody>
+      </p:sp>
+      <p:sp>
+        <p:nvSpPr>
+          <p:cNvPr id="135" name="Rounded Rectangle 134"/>
+          <p:cNvSpPr/>
+          <p:nvPr/>
+        </p:nvSpPr>
+        <p:spPr>
+          <a:xfrm>
+            <a:off x="6355080" y="4315968"/>
+            <a:ext cx="5943600" cy="1188720"/>
+          </a:xfrm>
+          <a:prstGeom prst="roundRect">
+            <a:avLst>
+              <a:gd name="adj" fmla="val 12000"/>
+            </a:avLst>
+          </a:prstGeom>
+          <a:solidFill>
+            <a:srgbClr val="F4F4F4"/>
+          </a:solidFill>
+          <a:ln>
+            <a:noFill/>
+          </a:ln>
+          <a:effectLst/>
+        </p:spPr>
+        <p:style>
+          <a:lnRef idx="1">
+            <a:schemeClr val="accent1"/>
+          </a:lnRef>
+          <a:fillRef idx="3">
+            <a:schemeClr val="accent1"/>
+          </a:fillRef>
+          <a:effectRef idx="2">
+            <a:schemeClr val="accent1"/>
+          </a:effectRef>
+          <a:fontRef idx="minor">
+            <a:schemeClr val="lt1"/>
+          </a:fontRef>
+        </p:style>
+        <p:txBody>
+          <a:bodyPr rtlCol="0" anchor="ctr" wrap="square" lIns="0" rIns="0" tIns="0" bIns="0"/>
+          <a:lstStyle/>
+          <a:p>
+            <a:pPr algn="l"/>
+            <a:r>
+              <a:rPr sz="1000" b="0">
+                <a:solidFill>
+                  <a:srgbClr val="262626"/>
+                </a:solidFill>
+                <a:latin typeface="Malgun Gothic"/>
+                <a:ea typeface="Malgun Gothic"/>
+                <a:cs typeface="Malgun Gothic"/>
+              </a:rPr>
+              <a:t/>
+            </a:r>
+          </a:p>
+        </p:txBody>
+      </p:sp>
+      <p:sp>
+        <p:nvSpPr>
+          <p:cNvPr id="136" name="Oval 135"/>
+          <p:cNvSpPr/>
+          <p:nvPr/>
+        </p:nvSpPr>
+        <p:spPr>
+          <a:xfrm>
+            <a:off x="6492240" y="4443983"/>
+            <a:ext cx="420624" cy="420624"/>
+          </a:xfrm>
+          <a:prstGeom prst="ellipse">
+            <a:avLst/>
+          </a:prstGeom>
+          <a:solidFill>
+            <a:srgbClr val="404040"/>
+          </a:solidFill>
+          <a:ln>
+            <a:noFill/>
+          </a:ln>
+          <a:effectLst/>
+        </p:spPr>
+        <p:style>
+          <a:lnRef idx="1">
+            <a:schemeClr val="accent1"/>
+          </a:lnRef>
+          <a:fillRef idx="3">
+            <a:schemeClr val="accent1"/>
+          </a:fillRef>
+          <a:effectRef idx="2">
+            <a:schemeClr val="accent1"/>
+          </a:effectRef>
+          <a:fontRef idx="minor">
+            <a:schemeClr val="lt1"/>
+          </a:fontRef>
+        </p:style>
+        <p:txBody>
+          <a:bodyPr rtlCol="0" anchor="ctr" wrap="square" lIns="0" rIns="0" tIns="0" bIns="0"/>
+          <a:lstStyle/>
+          <a:p>
+            <a:pPr algn="ctr"/>
+            <a:r>
+              <a:rPr sz="1600" b="1">
+                <a:solidFill>
+                  <a:srgbClr val="FFFFFF"/>
+                </a:solidFill>
+                <a:latin typeface="Malgun Gothic"/>
+                <a:ea typeface="Malgun Gothic"/>
+                <a:cs typeface="Malgun Gothic"/>
+              </a:rPr>
+              <a:t>3</a:t>
+            </a:r>
+          </a:p>
+        </p:txBody>
+      </p:sp>
+      <p:sp>
+        <p:nvSpPr>
+          <p:cNvPr id="137" name="TextBox 136"/>
+          <p:cNvSpPr txBox="1"/>
+          <p:nvPr/>
+        </p:nvSpPr>
+        <p:spPr>
+          <a:xfrm>
+            <a:off x="7040880" y="4425696"/>
+            <a:ext cx="3566160" cy="411480"/>
+          </a:xfrm>
+          <a:prstGeom prst="rect">
+            <a:avLst/>
+          </a:prstGeom>
+          <a:noFill/>
+        </p:spPr>
+        <p:txBody>
+          <a:bodyPr wrap="square" anchor="ctr" lIns="0" rIns="0" tIns="0" bIns="0">
+            <a:spAutoFit/>
+          </a:bodyPr>
+          <a:lstStyle/>
+          <a:p>
+            <a:pPr algn="l"/>
+            <a:r>
+              <a:rPr sz="1700" b="1">
+                <a:solidFill>
+                  <a:srgbClr val="262626"/>
+                </a:solidFill>
+                <a:latin typeface="Malgun Gothic"/>
+                <a:ea typeface="Malgun Gothic"/>
+                <a:cs typeface="Malgun Gothic"/>
+              </a:rPr>
+              <a:t>전송 주기 · 우선순위</a:t>
+            </a:r>
+          </a:p>
+        </p:txBody>
+      </p:sp>
+      <p:sp>
+        <p:nvSpPr>
+          <p:cNvPr id="138" name="TextBox 137"/>
+          <p:cNvSpPr txBox="1"/>
+          <p:nvPr/>
+        </p:nvSpPr>
+        <p:spPr>
+          <a:xfrm>
+            <a:off x="7040880" y="4846320"/>
+            <a:ext cx="3611880" cy="585216"/>
+          </a:xfrm>
+          <a:prstGeom prst="rect">
+            <a:avLst/>
+          </a:prstGeom>
+          <a:noFill/>
+        </p:spPr>
+        <p:txBody>
+          <a:bodyPr wrap="square" anchor="t" lIns="0" rIns="0" tIns="0" bIns="0">
+            <a:spAutoFit/>
+          </a:bodyPr>
+          <a:lstStyle/>
+          <a:p>
+            <a:pPr algn="l"/>
+            <a:r>
+              <a:rPr sz="1400" b="0">
+                <a:solidFill>
+                  <a:srgbClr val="595959"/>
+                </a:solidFill>
+                <a:latin typeface="Malgun Gothic"/>
+                <a:ea typeface="Malgun Gothic"/>
+                <a:cs typeface="Malgun Gothic"/>
+              </a:rPr>
+              <a:t>전송 중 요청은 저장 후 전송</a:t>
+            </a:r>
+          </a:p>
+          <a:p>
+            <a:pPr algn="l"/>
+            <a:r>
+              <a:rPr sz="1400" b="0">
+                <a:solidFill>
+                  <a:srgbClr val="595959"/>
+                </a:solidFill>
+                <a:latin typeface="Malgun Gothic"/>
+                <a:ea typeface="Malgun Gothic"/>
+                <a:cs typeface="Malgun Gothic"/>
+              </a:rPr>
+              <a:t>우선순위 ERROR &gt; get · auto</a:t>
+            </a:r>
+          </a:p>
+        </p:txBody>
+      </p:sp>
+      <p:sp>
+        <p:nvSpPr>
+          <p:cNvPr id="139" name="TextBox 138"/>
+          <p:cNvSpPr txBox="1"/>
+          <p:nvPr/>
+        </p:nvSpPr>
+        <p:spPr>
+          <a:xfrm>
+            <a:off x="10378440" y="4498848"/>
+            <a:ext cx="1828800" cy="502920"/>
+          </a:xfrm>
+          <a:prstGeom prst="rect">
+            <a:avLst/>
+          </a:prstGeom>
+          <a:noFill/>
+        </p:spPr>
+        <p:txBody>
+          <a:bodyPr wrap="square" anchor="ctr" lIns="0" rIns="0" tIns="0" bIns="0">
+            <a:spAutoFit/>
+          </a:bodyPr>
+          <a:lstStyle/>
+          <a:p>
+            <a:pPr algn="r"/>
+            <a:r>
+              <a:rPr sz="2400" b="1">
+                <a:solidFill>
+                  <a:srgbClr val="262626"/>
+                </a:solidFill>
+                <a:latin typeface="Malgun Gothic"/>
+                <a:ea typeface="Malgun Gothic"/>
+                <a:cs typeface="Malgun Gothic"/>
+              </a:rPr>
+              <a:t>1 Hz</a:t>
+            </a:r>
+          </a:p>
+        </p:txBody>
+      </p:sp>
+      <p:sp>
+        <p:nvSpPr>
+          <p:cNvPr id="140" name="TextBox 139"/>
+          <p:cNvSpPr txBox="1"/>
+          <p:nvPr/>
+        </p:nvSpPr>
+        <p:spPr>
+          <a:xfrm>
+            <a:off x="10378440" y="5029200"/>
+            <a:ext cx="1828800" cy="320040"/>
+          </a:xfrm>
+          <a:prstGeom prst="rect">
+            <a:avLst/>
+          </a:prstGeom>
+          <a:noFill/>
+        </p:spPr>
+        <p:txBody>
+          <a:bodyPr wrap="square" anchor="ctr" lIns="0" rIns="0" tIns="0" bIns="0">
+            <a:spAutoFit/>
+          </a:bodyPr>
+          <a:lstStyle/>
+          <a:p>
+            <a:pPr algn="r"/>
+            <a:r>
+              <a:rPr sz="1300" b="0">
+                <a:solidFill>
+                  <a:srgbClr val="595959"/>
+                </a:solidFill>
+                <a:latin typeface="Malgun Gothic"/>
+                <a:ea typeface="Malgun Gothic"/>
+                <a:cs typeface="Malgun Gothic"/>
+              </a:rPr>
+              <a:t>자동 전송</a:t>
+            </a:r>
+          </a:p>
+        </p:txBody>
+      </p:sp>
+      <p:sp>
+        <p:nvSpPr>
+          <p:cNvPr id="141" name="Rounded Rectangle 140"/>
+          <p:cNvSpPr/>
+          <p:nvPr/>
+        </p:nvSpPr>
+        <p:spPr>
+          <a:xfrm>
+            <a:off x="6355080" y="5614416"/>
+            <a:ext cx="5943600" cy="1188720"/>
+          </a:xfrm>
+          <a:prstGeom prst="roundRect">
+            <a:avLst>
+              <a:gd name="adj" fmla="val 12000"/>
+            </a:avLst>
+          </a:prstGeom>
+          <a:solidFill>
+            <a:srgbClr val="F4F4F4"/>
+          </a:solidFill>
+          <a:ln>
+            <a:noFill/>
+          </a:ln>
+          <a:effectLst/>
+        </p:spPr>
+        <p:style>
+          <a:lnRef idx="1">
+            <a:schemeClr val="accent1"/>
+          </a:lnRef>
+          <a:fillRef idx="3">
+            <a:schemeClr val="accent1"/>
+          </a:fillRef>
+          <a:effectRef idx="2">
+            <a:schemeClr val="accent1"/>
+          </a:effectRef>
+          <a:fontRef idx="minor">
+            <a:schemeClr val="lt1"/>
+          </a:fontRef>
+        </p:style>
+        <p:txBody>
+          <a:bodyPr rtlCol="0" anchor="ctr" wrap="square" lIns="0" rIns="0" tIns="0" bIns="0"/>
+          <a:lstStyle/>
+          <a:p>
+            <a:pPr algn="l"/>
+            <a:r>
+              <a:rPr sz="1000" b="0">
+                <a:solidFill>
+                  <a:srgbClr val="262626"/>
+                </a:solidFill>
+                <a:latin typeface="Malgun Gothic"/>
+                <a:ea typeface="Malgun Gothic"/>
+                <a:cs typeface="Malgun Gothic"/>
+              </a:rPr>
+              <a:t/>
+            </a:r>
+          </a:p>
+        </p:txBody>
+      </p:sp>
+      <p:sp>
+        <p:nvSpPr>
+          <p:cNvPr id="142" name="Oval 141"/>
+          <p:cNvSpPr/>
+          <p:nvPr/>
+        </p:nvSpPr>
+        <p:spPr>
+          <a:xfrm>
+            <a:off x="6492240" y="5742431"/>
+            <a:ext cx="420624" cy="420624"/>
+          </a:xfrm>
+          <a:prstGeom prst="ellipse">
+            <a:avLst/>
+          </a:prstGeom>
+          <a:solidFill>
+            <a:srgbClr val="404040"/>
+          </a:solidFill>
+          <a:ln>
+            <a:noFill/>
+          </a:ln>
+          <a:effectLst/>
+        </p:spPr>
+        <p:style>
+          <a:lnRef idx="1">
+            <a:schemeClr val="accent1"/>
+          </a:lnRef>
+          <a:fillRef idx="3">
+            <a:schemeClr val="accent1"/>
+          </a:fillRef>
+          <a:effectRef idx="2">
+            <a:schemeClr val="accent1"/>
+          </a:effectRef>
+          <a:fontRef idx="minor">
+            <a:schemeClr val="lt1"/>
+          </a:fontRef>
+        </p:style>
+        <p:txBody>
+          <a:bodyPr rtlCol="0" anchor="ctr" wrap="square" lIns="0" rIns="0" tIns="0" bIns="0"/>
+          <a:lstStyle/>
+          <a:p>
+            <a:pPr algn="ctr"/>
+            <a:r>
+              <a:rPr sz="1600" b="1">
+                <a:solidFill>
+                  <a:srgbClr val="FFFFFF"/>
+                </a:solidFill>
+                <a:latin typeface="Malgun Gothic"/>
+                <a:ea typeface="Malgun Gothic"/>
+                <a:cs typeface="Malgun Gothic"/>
+              </a:rPr>
+              <a:t>4</a:t>
+            </a:r>
+          </a:p>
+        </p:txBody>
+      </p:sp>
+      <p:sp>
+        <p:nvSpPr>
+          <p:cNvPr id="143" name="TextBox 142"/>
+          <p:cNvSpPr txBox="1"/>
+          <p:nvPr/>
+        </p:nvSpPr>
+        <p:spPr>
+          <a:xfrm>
+            <a:off x="7040880" y="5724144"/>
+            <a:ext cx="3566160" cy="411480"/>
+          </a:xfrm>
+          <a:prstGeom prst="rect">
+            <a:avLst/>
+          </a:prstGeom>
+          <a:noFill/>
+        </p:spPr>
+        <p:txBody>
+          <a:bodyPr wrap="square" anchor="ctr" lIns="0" rIns="0" tIns="0" bIns="0">
+            <a:spAutoFit/>
+          </a:bodyPr>
+          <a:lstStyle/>
+          <a:p>
+            <a:pPr algn="l"/>
+            <a:r>
+              <a:rPr sz="1700" b="1">
+                <a:solidFill>
+                  <a:srgbClr val="262626"/>
+                </a:solidFill>
+                <a:latin typeface="Malgun Gothic"/>
+                <a:ea typeface="Malgun Gothic"/>
+                <a:cs typeface="Malgun Gothic"/>
+              </a:rPr>
+              <a:t>시간 해상도</a:t>
+            </a:r>
+          </a:p>
+        </p:txBody>
+      </p:sp>
+      <p:sp>
+        <p:nvSpPr>
+          <p:cNvPr id="144" name="TextBox 143"/>
+          <p:cNvSpPr txBox="1"/>
+          <p:nvPr/>
+        </p:nvSpPr>
+        <p:spPr>
+          <a:xfrm>
+            <a:off x="7040880" y="6144768"/>
+            <a:ext cx="3611880" cy="585216"/>
+          </a:xfrm>
+          <a:prstGeom prst="rect">
+            <a:avLst/>
+          </a:prstGeom>
+          <a:noFill/>
+        </p:spPr>
+        <p:txBody>
+          <a:bodyPr wrap="square" anchor="t" lIns="0" rIns="0" tIns="0" bIns="0">
+            <a:spAutoFit/>
+          </a:bodyPr>
+          <a:lstStyle/>
+          <a:p>
+            <a:pPr algn="l"/>
+            <a:r>
+              <a:rPr sz="1400" b="0">
+                <a:solidFill>
+                  <a:srgbClr val="595959"/>
+                </a:solidFill>
+                <a:latin typeface="Malgun Gothic"/>
+                <a:ea typeface="Malgun Gothic"/>
+                <a:cs typeface="Malgun Gothic"/>
+              </a:rPr>
+              <a:t>디바운스 약 2 ms</a:t>
+            </a:r>
+          </a:p>
+          <a:p>
+            <a:pPr algn="l"/>
+            <a:r>
+              <a:rPr sz="1400" b="0">
+                <a:solidFill>
+                  <a:srgbClr val="595959"/>
+                </a:solidFill>
+                <a:latin typeface="Malgun Gothic"/>
+                <a:ea typeface="Malgun Gothic"/>
+                <a:cs typeface="Malgun Gothic"/>
+              </a:rPr>
+              <a:t>FND 한 바퀴 2 ms</a:t>
+            </a:r>
+          </a:p>
+        </p:txBody>
+      </p:sp>
+      <p:sp>
+        <p:nvSpPr>
+          <p:cNvPr id="145" name="TextBox 144"/>
+          <p:cNvSpPr txBox="1"/>
+          <p:nvPr/>
+        </p:nvSpPr>
+        <p:spPr>
+          <a:xfrm>
+            <a:off x="10378440" y="5797296"/>
+            <a:ext cx="1828800" cy="502920"/>
+          </a:xfrm>
+          <a:prstGeom prst="rect">
+            <a:avLst/>
+          </a:prstGeom>
+          <a:noFill/>
+        </p:spPr>
+        <p:txBody>
+          <a:bodyPr wrap="square" anchor="ctr" lIns="0" rIns="0" tIns="0" bIns="0">
+            <a:spAutoFit/>
+          </a:bodyPr>
+          <a:lstStyle/>
+          <a:p>
+            <a:pPr algn="r"/>
+            <a:r>
+              <a:rPr sz="2400" b="1">
+                <a:solidFill>
+                  <a:srgbClr val="262626"/>
+                </a:solidFill>
+                <a:latin typeface="Malgun Gothic"/>
+                <a:ea typeface="Malgun Gothic"/>
+                <a:cs typeface="Malgun Gothic"/>
+              </a:rPr>
+              <a:t>1/100 s</a:t>
+            </a:r>
+          </a:p>
+        </p:txBody>
+      </p:sp>
+      <p:sp>
+        <p:nvSpPr>
+          <p:cNvPr id="146" name="TextBox 145"/>
+          <p:cNvSpPr txBox="1"/>
+          <p:nvPr/>
+        </p:nvSpPr>
+        <p:spPr>
+          <a:xfrm>
+            <a:off x="10378440" y="6327648"/>
+            <a:ext cx="1828800" cy="320040"/>
+          </a:xfrm>
+          <a:prstGeom prst="rect">
+            <a:avLst/>
+          </a:prstGeom>
+          <a:noFill/>
+        </p:spPr>
+        <p:txBody>
+          <a:bodyPr wrap="square" anchor="ctr" lIns="0" rIns="0" tIns="0" bIns="0">
+            <a:spAutoFit/>
+          </a:bodyPr>
+          <a:lstStyle/>
+          <a:p>
+            <a:pPr algn="r"/>
+            <a:r>
+              <a:rPr sz="1300" b="0">
+                <a:solidFill>
+                  <a:srgbClr val="595959"/>
+                </a:solidFill>
+                <a:latin typeface="Malgun Gothic"/>
+                <a:ea typeface="Malgun Gothic"/>
+                <a:cs typeface="Malgun Gothic"/>
+              </a:rPr>
+              <a:t>표시 단위</a:t>
+            </a:r>
+          </a:p>
+        </p:txBody>
+      </p:sp>
+      <p:sp>
+        <p:nvSpPr>
+          <p:cNvPr id="147" name="Rounded Rectangle 146"/>
+          <p:cNvSpPr/>
+          <p:nvPr/>
+        </p:nvSpPr>
+        <p:spPr>
+          <a:xfrm>
+            <a:off x="6355080" y="6912864"/>
+            <a:ext cx="5943600" cy="1188720"/>
+          </a:xfrm>
+          <a:prstGeom prst="roundRect">
+            <a:avLst>
+              <a:gd name="adj" fmla="val 12000"/>
+            </a:avLst>
+          </a:prstGeom>
+          <a:solidFill>
+            <a:srgbClr val="F4F4F4"/>
+          </a:solidFill>
+          <a:ln>
+            <a:noFill/>
+          </a:ln>
+          <a:effectLst/>
+        </p:spPr>
+        <p:style>
+          <a:lnRef idx="1">
+            <a:schemeClr val="accent1"/>
+          </a:lnRef>
+          <a:fillRef idx="3">
+            <a:schemeClr val="accent1"/>
+          </a:fillRef>
+          <a:effectRef idx="2">
+            <a:schemeClr val="accent1"/>
+          </a:effectRef>
+          <a:fontRef idx="minor">
+            <a:schemeClr val="lt1"/>
+          </a:fontRef>
+        </p:style>
+        <p:txBody>
+          <a:bodyPr rtlCol="0" anchor="ctr" wrap="square" lIns="0" rIns="0" tIns="0" bIns="0"/>
+          <a:lstStyle/>
+          <a:p>
+            <a:pPr algn="l"/>
+            <a:r>
+              <a:rPr sz="1000" b="0">
+                <a:solidFill>
+                  <a:srgbClr val="262626"/>
+                </a:solidFill>
+                <a:latin typeface="Malgun Gothic"/>
+                <a:ea typeface="Malgun Gothic"/>
+                <a:cs typeface="Malgun Gothic"/>
+              </a:rPr>
+              <a:t/>
+            </a:r>
+          </a:p>
+        </p:txBody>
+      </p:sp>
+      <p:sp>
+        <p:nvSpPr>
+          <p:cNvPr id="148" name="Oval 147"/>
+          <p:cNvSpPr/>
+          <p:nvPr/>
+        </p:nvSpPr>
+        <p:spPr>
+          <a:xfrm>
+            <a:off x="6492240" y="7040879"/>
+            <a:ext cx="420624" cy="420624"/>
+          </a:xfrm>
+          <a:prstGeom prst="ellipse">
+            <a:avLst/>
+          </a:prstGeom>
+          <a:solidFill>
+            <a:srgbClr val="404040"/>
+          </a:solidFill>
+          <a:ln>
+            <a:noFill/>
+          </a:ln>
+          <a:effectLst/>
+        </p:spPr>
+        <p:style>
+          <a:lnRef idx="1">
+            <a:schemeClr val="accent1"/>
+          </a:lnRef>
+          <a:fillRef idx="3">
+            <a:schemeClr val="accent1"/>
+          </a:fillRef>
+          <a:effectRef idx="2">
+            <a:schemeClr val="accent1"/>
+          </a:effectRef>
+          <a:fontRef idx="minor">
+            <a:schemeClr val="lt1"/>
+          </a:fontRef>
+        </p:style>
+        <p:txBody>
+          <a:bodyPr rtlCol="0" anchor="ctr" wrap="square" lIns="0" rIns="0" tIns="0" bIns="0"/>
+          <a:lstStyle/>
+          <a:p>
+            <a:pPr algn="ctr"/>
+            <a:r>
+              <a:rPr sz="1600" b="1">
+                <a:solidFill>
+                  <a:srgbClr val="FFFFFF"/>
+                </a:solidFill>
+                <a:latin typeface="Malgun Gothic"/>
+                <a:ea typeface="Malgun Gothic"/>
+                <a:cs typeface="Malgun Gothic"/>
+              </a:rPr>
+              <a:t>5</a:t>
+            </a:r>
+          </a:p>
+        </p:txBody>
+      </p:sp>
+      <p:sp>
+        <p:nvSpPr>
+          <p:cNvPr id="149" name="TextBox 148"/>
+          <p:cNvSpPr txBox="1"/>
+          <p:nvPr/>
+        </p:nvSpPr>
+        <p:spPr>
+          <a:xfrm>
+            <a:off x="7040880" y="7022592"/>
+            <a:ext cx="3566160" cy="411480"/>
+          </a:xfrm>
+          <a:prstGeom prst="rect">
+            <a:avLst/>
+          </a:prstGeom>
+          <a:noFill/>
+        </p:spPr>
+        <p:txBody>
+          <a:bodyPr wrap="square" anchor="ctr" lIns="0" rIns="0" tIns="0" bIns="0">
+            <a:spAutoFit/>
+          </a:bodyPr>
+          <a:lstStyle/>
+          <a:p>
+            <a:pPr algn="l"/>
+            <a:r>
+              <a:rPr sz="1700" b="1">
+                <a:solidFill>
+                  <a:srgbClr val="262626"/>
+                </a:solidFill>
+                <a:latin typeface="Malgun Gothic"/>
+                <a:ea typeface="Malgun Gothic"/>
+                <a:cs typeface="Malgun Gothic"/>
+              </a:rPr>
+              <a:t>센서 제어 · 오류 처리</a:t>
+            </a:r>
+          </a:p>
+        </p:txBody>
+      </p:sp>
+      <p:sp>
+        <p:nvSpPr>
+          <p:cNvPr id="150" name="TextBox 149"/>
+          <p:cNvSpPr txBox="1"/>
+          <p:nvPr/>
+        </p:nvSpPr>
+        <p:spPr>
+          <a:xfrm>
+            <a:off x="7040880" y="7443215"/>
+            <a:ext cx="3611880" cy="585216"/>
+          </a:xfrm>
+          <a:prstGeom prst="rect">
+            <a:avLst/>
+          </a:prstGeom>
+          <a:noFill/>
+        </p:spPr>
+        <p:txBody>
+          <a:bodyPr wrap="square" anchor="t" lIns="0" rIns="0" tIns="0" bIns="0">
+            <a:spAutoFit/>
+          </a:bodyPr>
+          <a:lstStyle/>
+          <a:p>
+            <a:pPr algn="l"/>
+            <a:r>
+              <a:rPr sz="1400" b="0">
+                <a:solidFill>
+                  <a:srgbClr val="595959"/>
+                </a:solidFill>
+                <a:latin typeface="Malgun Gothic"/>
+                <a:ea typeface="Malgun Gothic"/>
+                <a:cs typeface="Malgun Gothic"/>
+              </a:rPr>
+              <a:t>DHT11 전원 후 1 s 대기</a:t>
+            </a:r>
+          </a:p>
+          <a:p>
+            <a:pPr algn="l"/>
+            <a:r>
+              <a:rPr sz="1400" b="0">
+                <a:solidFill>
+                  <a:srgbClr val="595959"/>
+                </a:solidFill>
+                <a:latin typeface="Malgun Gothic"/>
+                <a:ea typeface="Malgun Gothic"/>
+                <a:cs typeface="Malgun Gothic"/>
+              </a:rPr>
+              <a:t>실패 시 FND Err1~3 (원인별 status)</a:t>
+            </a:r>
+          </a:p>
+        </p:txBody>
+      </p:sp>
+      <p:sp>
+        <p:nvSpPr>
+          <p:cNvPr id="151" name="TextBox 150"/>
+          <p:cNvSpPr txBox="1"/>
+          <p:nvPr/>
+        </p:nvSpPr>
+        <p:spPr>
+          <a:xfrm>
+            <a:off x="10378440" y="7095744"/>
+            <a:ext cx="1828800" cy="502920"/>
+          </a:xfrm>
+          <a:prstGeom prst="rect">
+            <a:avLst/>
+          </a:prstGeom>
+          <a:noFill/>
+        </p:spPr>
+        <p:txBody>
+          <a:bodyPr wrap="square" anchor="ctr" lIns="0" rIns="0" tIns="0" bIns="0">
+            <a:spAutoFit/>
+          </a:bodyPr>
+          <a:lstStyle/>
+          <a:p>
+            <a:pPr algn="r"/>
+            <a:r>
+              <a:rPr sz="2400" b="1">
+                <a:solidFill>
+                  <a:srgbClr val="262626"/>
+                </a:solidFill>
+                <a:latin typeface="Malgun Gothic"/>
+                <a:ea typeface="Malgun Gothic"/>
+                <a:cs typeface="Malgun Gothic"/>
+              </a:rPr>
+              <a:t>60 ms · 2 s</a:t>
+            </a:r>
+          </a:p>
+        </p:txBody>
+      </p:sp>
+      <p:sp>
+        <p:nvSpPr>
+          <p:cNvPr id="152" name="TextBox 151"/>
+          <p:cNvSpPr txBox="1"/>
+          <p:nvPr/>
+        </p:nvSpPr>
+        <p:spPr>
+          <a:xfrm>
+            <a:off x="10378440" y="7626096"/>
+            <a:ext cx="1828800" cy="320040"/>
+          </a:xfrm>
+          <a:prstGeom prst="rect">
+            <a:avLst/>
+          </a:prstGeom>
+          <a:noFill/>
+        </p:spPr>
+        <p:txBody>
+          <a:bodyPr wrap="square" anchor="ctr" lIns="0" rIns="0" tIns="0" bIns="0">
+            <a:spAutoFit/>
+          </a:bodyPr>
+          <a:lstStyle/>
+          <a:p>
+            <a:pPr algn="r"/>
+            <a:r>
+              <a:rPr sz="1300" b="0">
+                <a:solidFill>
+                  <a:srgbClr val="595959"/>
+                </a:solidFill>
+                <a:latin typeface="Malgun Gothic"/>
+                <a:ea typeface="Malgun Gothic"/>
+                <a:cs typeface="Malgun Gothic"/>
+              </a:rPr>
+              <a:t>SR04 · DHT11 주기</a:t>
+            </a:r>
+          </a:p>
+        </p:txBody>
+      </p:sp>
+      <p:sp>
+        <p:nvSpPr>
+          <p:cNvPr id="153" name="Rounded Rectangle 152"/>
+          <p:cNvSpPr/>
+          <p:nvPr/>
+        </p:nvSpPr>
+        <p:spPr>
+          <a:xfrm>
+            <a:off x="841248" y="3017520"/>
+            <a:ext cx="2103120" cy="4846320"/>
+          </a:xfrm>
+          <a:prstGeom prst="roundRect">
+            <a:avLst>
+              <a:gd name="adj" fmla="val 6000"/>
+            </a:avLst>
+          </a:prstGeom>
+          <a:solidFill>
+            <a:srgbClr val="FFFFFF"/>
+          </a:solidFill>
+          <a:ln w="31750">
+            <a:solidFill>
+              <a:srgbClr val="404040"/>
+            </a:solidFill>
+          </a:ln>
+          <a:effectLst/>
+        </p:spPr>
+        <p:style>
+          <a:lnRef idx="1">
+            <a:schemeClr val="accent1"/>
+          </a:lnRef>
+          <a:fillRef idx="3">
+            <a:schemeClr val="accent1"/>
+          </a:fillRef>
+          <a:effectRef idx="2">
+            <a:schemeClr val="accent1"/>
+          </a:effectRef>
+          <a:fontRef idx="minor">
+            <a:schemeClr val="lt1"/>
+          </a:fontRef>
+        </p:style>
+        <p:txBody>
+          <a:bodyPr rtlCol="0" anchor="ctr"/>
+          <a:lstStyle/>
+          <a:p>
+            <a:pPr algn="ctr"/>
+          </a:p>
+        </p:txBody>
+      </p:sp>
+      <p:sp>
+        <p:nvSpPr>
+          <p:cNvPr id="154" name="TextBox 153"/>
+          <p:cNvSpPr txBox="1"/>
+          <p:nvPr/>
+        </p:nvSpPr>
+        <p:spPr>
+          <a:xfrm>
+            <a:off x="841248" y="3200400"/>
+            <a:ext cx="2103120" cy="822960"/>
+          </a:xfrm>
+          <a:prstGeom prst="rect">
+            <a:avLst/>
+          </a:prstGeom>
+          <a:noFill/>
+        </p:spPr>
+        <p:txBody>
+          <a:bodyPr wrap="square" anchor="ctr" lIns="0" rIns="0" tIns="0" bIns="0">
+            <a:spAutoFit/>
+          </a:bodyPr>
+          <a:lstStyle/>
+          <a:p>
+            <a:pPr algn="ctr"/>
+            <a:r>
+              <a:rPr sz="2400" b="1">
+                <a:solidFill>
+                  <a:srgbClr val="262626"/>
+                </a:solidFill>
+                <a:latin typeface="Malgun Gothic"/>
+                <a:ea typeface="Malgun Gothic"/>
+                <a:cs typeface="Malgun Gothic"/>
+              </a:rPr>
+              <a:t>PC</a:t>
+            </a:r>
+          </a:p>
+          <a:p>
+            <a:pPr algn="ctr"/>
+            <a:r>
+              <a:rPr sz="1500" b="0">
+                <a:solidFill>
+                  <a:srgbClr val="595959"/>
+                </a:solidFill>
+                <a:latin typeface="Malgun Gothic"/>
+                <a:ea typeface="Malgun Gothic"/>
+                <a:cs typeface="Malgun Gothic"/>
+              </a:rPr>
+              <a:t>시리얼 터미널</a:t>
+            </a:r>
+          </a:p>
+        </p:txBody>
+      </p:sp>
+      <p:sp>
+        <p:nvSpPr>
+          <p:cNvPr id="155" name="Rounded Rectangle 154"/>
+          <p:cNvSpPr/>
+          <p:nvPr/>
+        </p:nvSpPr>
+        <p:spPr>
+          <a:xfrm>
+            <a:off x="1005840" y="4206240"/>
+            <a:ext cx="1773936" cy="3383280"/>
+          </a:xfrm>
+          <a:prstGeom prst="roundRect">
+            <a:avLst>
+              <a:gd name="adj" fmla="val 5000"/>
+            </a:avLst>
+          </a:prstGeom>
+          <a:solidFill>
+            <a:srgbClr val="262626"/>
+          </a:solidFill>
+          <a:ln>
+            <a:noFill/>
+          </a:ln>
+          <a:effectLst/>
+        </p:spPr>
+        <p:style>
+          <a:lnRef idx="1">
+            <a:schemeClr val="accent1"/>
+          </a:lnRef>
+          <a:fillRef idx="3">
+            <a:schemeClr val="accent1"/>
+          </a:fillRef>
+          <a:effectRef idx="2">
+            <a:schemeClr val="accent1"/>
+          </a:effectRef>
+          <a:fontRef idx="minor">
+            <a:schemeClr val="lt1"/>
+          </a:fontRef>
+        </p:style>
+        <p:txBody>
+          <a:bodyPr rtlCol="0" anchor="t" wrap="square" lIns="137160" rIns="137160" tIns="182880" bIns="0"/>
+          <a:lstStyle/>
+          <a:p>
+            <a:pPr algn="l">
+              <a:spcAft>
+                <a:spcPts val="2200"/>
+              </a:spcAft>
+            </a:pPr>
+            <a:r>
+              <a:rPr sz="1600" b="1">
+                <a:solidFill>
+                  <a:srgbClr val="FFFFFF"/>
+                </a:solidFill>
+                <a:latin typeface="Consolas"/>
+                <a:ea typeface="Malgun Gothic"/>
+                <a:cs typeface="Malgun Gothic"/>
+              </a:rPr>
+              <a:t>&gt; /mod dist</a:t>
+            </a:r>
+          </a:p>
+          <a:p>
+            <a:pPr algn="l">
+              <a:spcAft>
+                <a:spcPts val="2200"/>
+              </a:spcAft>
+            </a:pPr>
+            <a:r>
+              <a:rPr sz="1600" b="1">
+                <a:solidFill>
+                  <a:srgbClr val="FFFFFF"/>
+                </a:solidFill>
+                <a:latin typeface="Consolas"/>
+                <a:ea typeface="Malgun Gothic"/>
+                <a:cs typeface="Malgun Gothic"/>
+              </a:rPr>
+              <a:t>&gt; /get</a:t>
+            </a:r>
+          </a:p>
+          <a:p>
+            <a:pPr algn="l">
+              <a:spcAft>
+                <a:spcPts val="2200"/>
+              </a:spcAft>
+            </a:pPr>
+            <a:r>
+              <a:rPr sz="1600" b="1">
+                <a:solidFill>
+                  <a:srgbClr val="FFFFFF"/>
+                </a:solidFill>
+                <a:latin typeface="Consolas"/>
+                <a:ea typeface="Malgun Gothic"/>
+                <a:cs typeface="Malgun Gothic"/>
+              </a:rPr>
+              <a:t>&gt; /btn U</a:t>
+            </a:r>
+          </a:p>
+          <a:p>
+            <a:pPr algn="l">
+              <a:spcAft>
+                <a:spcPts val="2200"/>
+              </a:spcAft>
+            </a:pPr>
+            <a:r>
+              <a:rPr sz="1600" b="1">
+                <a:solidFill>
+                  <a:srgbClr val="FFFFFF"/>
+                </a:solidFill>
+                <a:latin typeface="Consolas"/>
+                <a:ea typeface="Malgun Gothic"/>
+                <a:cs typeface="Malgun Gothic"/>
+              </a:rPr>
+              <a:t>&gt; /auto all</a:t>
+            </a:r>
+          </a:p>
+          <a:p>
+            <a:pPr algn="l">
+              <a:spcAft>
+                <a:spcPts val="2200"/>
+              </a:spcAft>
+            </a:pPr>
+            <a:r>
+              <a:rPr sz="1600" b="1">
+                <a:solidFill>
+                  <a:srgbClr val="FFFFFF"/>
+                </a:solidFill>
+                <a:latin typeface="Consolas"/>
+                <a:ea typeface="Malgun Gothic"/>
+                <a:cs typeface="Malgun Gothic"/>
+              </a:rPr>
+              <a:t>&gt; /set 24h</a:t>
+            </a:r>
+          </a:p>
+        </p:txBody>
+      </p:sp>
+      <p:cxnSp>
+        <p:nvCxnSpPr>
+          <p:cNvPr id="156" name="Connector 155"/>
+          <p:cNvCxnSpPr/>
+          <p:nvPr/>
+        </p:nvCxnSpPr>
+        <p:spPr>
+          <a:xfrm>
+            <a:off x="3017520" y="5440679"/>
+            <a:ext cx="3081528" cy="0"/>
+          </a:xfrm>
+          <a:prstGeom prst="line">
+            <a:avLst/>
+          </a:prstGeom>
+          <a:ln w="38100">
+            <a:solidFill>
+              <a:srgbClr val="6B46C1"/>
+            </a:solidFill>
+            <a:headEnd type="triangle" w="med" len="med"/>
+            <a:tailEnd type="triangle" w="med" len="med"/>
+          </a:ln>
+        </p:spPr>
+        <p:style>
+          <a:lnRef idx="2">
+            <a:schemeClr val="accent1"/>
+          </a:lnRef>
+          <a:fillRef idx="0">
+            <a:schemeClr val="accent1"/>
+          </a:fillRef>
+          <a:effectRef idx="1">
+            <a:schemeClr val="accent1"/>
+          </a:effectRef>
+          <a:fontRef idx="minor">
+            <a:schemeClr val="tx1"/>
+          </a:fontRef>
+        </p:style>
+      </p:cxnSp>
+      <p:sp>
+        <p:nvSpPr>
+          <p:cNvPr id="157" name="Oval 156"/>
+          <p:cNvSpPr/>
+          <p:nvPr/>
+        </p:nvSpPr>
+        <p:spPr>
+          <a:xfrm>
+            <a:off x="3127248" y="3840479"/>
+            <a:ext cx="420624" cy="420624"/>
+          </a:xfrm>
+          <a:prstGeom prst="ellipse">
+            <a:avLst/>
+          </a:prstGeom>
+          <a:solidFill>
+            <a:srgbClr val="6B46C1"/>
+          </a:solidFill>
+          <a:ln>
+            <a:noFill/>
+          </a:ln>
+          <a:effectLst/>
+        </p:spPr>
+        <p:style>
+          <a:lnRef idx="1">
+            <a:schemeClr val="accent1"/>
+          </a:lnRef>
+          <a:fillRef idx="3">
+            <a:schemeClr val="accent1"/>
+          </a:fillRef>
+          <a:effectRef idx="2">
+            <a:schemeClr val="accent1"/>
+          </a:effectRef>
+          <a:fontRef idx="minor">
+            <a:schemeClr val="lt1"/>
+          </a:fontRef>
+        </p:style>
+        <p:txBody>
+          <a:bodyPr rtlCol="0" anchor="ctr" wrap="square" lIns="0" rIns="0" tIns="0" bIns="0"/>
+          <a:lstStyle/>
+          <a:p>
+            <a:pPr algn="ctr"/>
+            <a:r>
+              <a:rPr sz="1600" b="1">
+                <a:solidFill>
+                  <a:srgbClr val="FFFFFF"/>
+                </a:solidFill>
+                <a:latin typeface="Malgun Gothic"/>
+                <a:ea typeface="Malgun Gothic"/>
+                <a:cs typeface="Malgun Gothic"/>
+              </a:rPr>
+              <a:t>2</a:t>
+            </a:r>
+          </a:p>
+        </p:txBody>
+      </p:sp>
+      <p:sp>
+        <p:nvSpPr>
+          <p:cNvPr id="158" name="TextBox 157"/>
+          <p:cNvSpPr txBox="1"/>
+          <p:nvPr/>
+        </p:nvSpPr>
+        <p:spPr>
+          <a:xfrm>
+            <a:off x="3675887" y="3840479"/>
+            <a:ext cx="2313432" cy="420624"/>
+          </a:xfrm>
+          <a:prstGeom prst="rect">
+            <a:avLst/>
+          </a:prstGeom>
+          <a:noFill/>
+        </p:spPr>
+        <p:txBody>
+          <a:bodyPr wrap="square" anchor="ctr" lIns="0" rIns="0" tIns="0" bIns="0">
+            <a:spAutoFit/>
+          </a:bodyPr>
+          <a:lstStyle/>
+          <a:p>
+            <a:pPr algn="l"/>
+            <a:r>
+              <a:rPr sz="1700" b="1">
+                <a:solidFill>
+                  <a:srgbClr val="6B46C1"/>
+                </a:solidFill>
+                <a:latin typeface="Malgun Gothic"/>
+                <a:ea typeface="Malgun Gothic"/>
+                <a:cs typeface="Malgun Gothic"/>
+              </a:rPr>
+              <a:t>UART 인터페이스</a:t>
+            </a:r>
+          </a:p>
+        </p:txBody>
+      </p:sp>
+      <p:sp>
+        <p:nvSpPr>
+          <p:cNvPr id="159" name="TextBox 158"/>
+          <p:cNvSpPr txBox="1"/>
+          <p:nvPr/>
+        </p:nvSpPr>
+        <p:spPr>
+          <a:xfrm>
+            <a:off x="3127248" y="4434840"/>
+            <a:ext cx="2862072" cy="548640"/>
+          </a:xfrm>
+          <a:prstGeom prst="rect">
+            <a:avLst/>
+          </a:prstGeom>
+          <a:noFill/>
+        </p:spPr>
+        <p:txBody>
+          <a:bodyPr wrap="square" anchor="ctr" lIns="0" rIns="0" tIns="0" bIns="0">
+            <a:spAutoFit/>
+          </a:bodyPr>
+          <a:lstStyle/>
+          <a:p>
+            <a:pPr algn="ctr"/>
+            <a:r>
+              <a:rPr sz="2400" b="1">
+                <a:solidFill>
+                  <a:srgbClr val="262626"/>
+                </a:solidFill>
+                <a:latin typeface="Malgun Gothic"/>
+                <a:ea typeface="Malgun Gothic"/>
+                <a:cs typeface="Malgun Gothic"/>
+              </a:rPr>
+              <a:t>9600 bps 8N1</a:t>
+            </a:r>
+          </a:p>
+        </p:txBody>
+      </p:sp>
+      <p:sp>
+        <p:nvSpPr>
+          <p:cNvPr id="160" name="TextBox 159"/>
+          <p:cNvSpPr txBox="1"/>
+          <p:nvPr/>
+        </p:nvSpPr>
+        <p:spPr>
+          <a:xfrm>
+            <a:off x="3127248" y="5669279"/>
+            <a:ext cx="2862072" cy="1097280"/>
+          </a:xfrm>
+          <a:prstGeom prst="rect">
+            <a:avLst/>
+          </a:prstGeom>
+          <a:noFill/>
+        </p:spPr>
+        <p:txBody>
+          <a:bodyPr wrap="square" anchor="t" lIns="0" rIns="0" tIns="0" bIns="0">
+            <a:spAutoFit/>
+          </a:bodyPr>
+          <a:lstStyle/>
+          <a:p>
+            <a:pPr algn="ctr"/>
+            <a:r>
+              <a:rPr sz="1500" b="0">
+                <a:solidFill>
+                  <a:srgbClr val="595959"/>
+                </a:solidFill>
+                <a:latin typeface="Malgun Gothic"/>
+                <a:ea typeface="Malgun Gothic"/>
+                <a:cs typeface="Malgun Gothic"/>
+              </a:rPr>
+              <a:t>16× 오버샘플링</a:t>
+            </a:r>
+          </a:p>
+          <a:p>
+            <a:pPr algn="ctr"/>
+            <a:r>
+              <a:rPr sz="1500" b="0">
+                <a:solidFill>
+                  <a:srgbClr val="595959"/>
+                </a:solidFill>
+                <a:latin typeface="Malgun Gothic"/>
+                <a:ea typeface="Malgun Gothic"/>
+                <a:cs typeface="Malgun Gothic"/>
+              </a:rPr>
+              <a:t>FIFO RX 8 / TX 64</a:t>
+            </a:r>
+          </a:p>
+          <a:p>
+            <a:pPr algn="ctr"/>
+            <a:r>
+              <a:rPr sz="1500" b="0">
+                <a:solidFill>
+                  <a:srgbClr val="595959"/>
+                </a:solidFill>
+                <a:latin typeface="Malgun Gothic"/>
+                <a:ea typeface="Malgun Gothic"/>
+                <a:cs typeface="Malgun Gothic"/>
+              </a:rPr>
+              <a:t>형식 오류 → ERROR</a:t>
+            </a:r>
+          </a:p>
+        </p:txBody>
+      </p:sp>
+      <p:sp>
+        <p:nvSpPr>
+          <p:cNvPr id="161" name="Rounded Rectangle 160"/>
+          <p:cNvSpPr/>
+          <p:nvPr/>
+        </p:nvSpPr>
+        <p:spPr>
+          <a:xfrm>
+            <a:off x="14538960" y="3017520"/>
+            <a:ext cx="2926080" cy="4846320"/>
+          </a:xfrm>
+          <a:prstGeom prst="roundRect">
+            <a:avLst>
+              <a:gd name="adj" fmla="val 6000"/>
+            </a:avLst>
+          </a:prstGeom>
+          <a:solidFill>
+            <a:srgbClr val="FFFFFF"/>
+          </a:solidFill>
+          <a:ln w="31750">
+            <a:solidFill>
+              <a:srgbClr val="404040"/>
+            </a:solidFill>
+          </a:ln>
+          <a:effectLst/>
+        </p:spPr>
+        <p:style>
+          <a:lnRef idx="1">
+            <a:schemeClr val="accent1"/>
+          </a:lnRef>
+          <a:fillRef idx="3">
+            <a:schemeClr val="accent1"/>
+          </a:fillRef>
+          <a:effectRef idx="2">
+            <a:schemeClr val="accent1"/>
+          </a:effectRef>
+          <a:fontRef idx="minor">
+            <a:schemeClr val="lt1"/>
+          </a:fontRef>
+        </p:style>
+        <p:txBody>
+          <a:bodyPr rtlCol="0" anchor="ctr"/>
+          <a:lstStyle/>
+          <a:p>
+            <a:pPr algn="ctr"/>
+          </a:p>
+        </p:txBody>
+      </p:sp>
+      <p:sp>
+        <p:nvSpPr>
+          <p:cNvPr id="162" name="Oval 161"/>
+          <p:cNvSpPr/>
+          <p:nvPr/>
+        </p:nvSpPr>
+        <p:spPr>
+          <a:xfrm>
+            <a:off x="14721840" y="3200400"/>
+            <a:ext cx="420624" cy="420624"/>
+          </a:xfrm>
+          <a:prstGeom prst="ellipse">
+            <a:avLst/>
+          </a:prstGeom>
+          <a:solidFill>
+            <a:srgbClr val="404040"/>
+          </a:solidFill>
+          <a:ln>
+            <a:noFill/>
+          </a:ln>
+          <a:effectLst/>
+        </p:spPr>
+        <p:style>
+          <a:lnRef idx="1">
+            <a:schemeClr val="accent1"/>
+          </a:lnRef>
+          <a:fillRef idx="3">
+            <a:schemeClr val="accent1"/>
+          </a:fillRef>
+          <a:effectRef idx="2">
+            <a:schemeClr val="accent1"/>
+          </a:effectRef>
+          <a:fontRef idx="minor">
+            <a:schemeClr val="lt1"/>
+          </a:fontRef>
+        </p:style>
+        <p:txBody>
+          <a:bodyPr rtlCol="0" anchor="ctr" wrap="square" lIns="0" rIns="0" tIns="0" bIns="0"/>
+          <a:lstStyle/>
+          <a:p>
+            <a:pPr algn="ctr"/>
+            <a:r>
+              <a:rPr sz="1600" b="1">
+                <a:solidFill>
+                  <a:srgbClr val="FFFFFF"/>
+                </a:solidFill>
+                <a:latin typeface="Malgun Gothic"/>
+                <a:ea typeface="Malgun Gothic"/>
+                <a:cs typeface="Malgun Gothic"/>
+              </a:rPr>
+              <a:t>6</a:t>
+            </a:r>
+          </a:p>
+        </p:txBody>
+      </p:sp>
+      <p:sp>
+        <p:nvSpPr>
+          <p:cNvPr id="163" name="TextBox 162"/>
+          <p:cNvSpPr txBox="1"/>
+          <p:nvPr/>
+        </p:nvSpPr>
+        <p:spPr>
+          <a:xfrm>
+            <a:off x="15270480" y="3154679"/>
+            <a:ext cx="2103120" cy="548640"/>
+          </a:xfrm>
+          <a:prstGeom prst="rect">
+            <a:avLst/>
+          </a:prstGeom>
+          <a:noFill/>
+        </p:spPr>
+        <p:txBody>
+          <a:bodyPr wrap="square" anchor="ctr" lIns="0" rIns="0" tIns="0" bIns="0">
+            <a:spAutoFit/>
+          </a:bodyPr>
+          <a:lstStyle/>
+          <a:p>
+            <a:pPr algn="l"/>
+            <a:r>
+              <a:rPr sz="1700" b="1">
+                <a:solidFill>
+                  <a:srgbClr val="262626"/>
+                </a:solidFill>
+                <a:latin typeface="Malgun Gothic"/>
+                <a:ea typeface="Malgun Gothic"/>
+                <a:cs typeface="Malgun Gothic"/>
+              </a:rPr>
+              <a:t>센서 성능</a:t>
+            </a:r>
+          </a:p>
+          <a:p>
+            <a:pPr algn="l"/>
+            <a:r>
+              <a:rPr sz="1200" b="0">
+                <a:solidFill>
+                  <a:srgbClr val="595959"/>
+                </a:solidFill>
+                <a:latin typeface="Malgun Gothic"/>
+                <a:ea typeface="Malgun Gothic"/>
+                <a:cs typeface="Malgun Gothic"/>
+              </a:rPr>
+              <a:t>외부 센서 · 데이터시트</a:t>
+            </a:r>
+          </a:p>
+        </p:txBody>
+      </p:sp>
+      <p:sp>
+        <p:nvSpPr>
+          <p:cNvPr id="164" name="TextBox 163"/>
+          <p:cNvSpPr txBox="1"/>
+          <p:nvPr/>
+        </p:nvSpPr>
+        <p:spPr>
+          <a:xfrm>
+            <a:off x="14767559" y="3977639"/>
+            <a:ext cx="2560320" cy="914400"/>
+          </a:xfrm>
+          <a:prstGeom prst="rect">
+            <a:avLst/>
+          </a:prstGeom>
+          <a:noFill/>
+        </p:spPr>
+        <p:txBody>
+          <a:bodyPr wrap="square" anchor="t" lIns="0" rIns="0" tIns="0" bIns="0">
+            <a:spAutoFit/>
+          </a:bodyPr>
+          <a:lstStyle/>
+          <a:p>
+            <a:pPr algn="l"/>
+            <a:r>
+              <a:rPr sz="1600" b="1">
+                <a:solidFill>
+                  <a:srgbClr val="2F855A"/>
+                </a:solidFill>
+                <a:latin typeface="Malgun Gothic"/>
+                <a:ea typeface="Malgun Gothic"/>
+                <a:cs typeface="Malgun Gothic"/>
+              </a:rPr>
+              <a:t>SR04</a:t>
+            </a:r>
+          </a:p>
+          <a:p>
+            <a:pPr algn="l"/>
+            <a:r>
+              <a:rPr sz="2400" b="1">
+                <a:solidFill>
+                  <a:srgbClr val="262626"/>
+                </a:solidFill>
+                <a:latin typeface="Malgun Gothic"/>
+                <a:ea typeface="Malgun Gothic"/>
+                <a:cs typeface="Malgun Gothic"/>
+              </a:rPr>
+              <a:t>2 ~ 400 cm</a:t>
+            </a:r>
+          </a:p>
+        </p:txBody>
+      </p:sp>
+      <p:sp>
+        <p:nvSpPr>
+          <p:cNvPr id="165" name="TextBox 164"/>
+          <p:cNvSpPr txBox="1"/>
+          <p:nvPr/>
+        </p:nvSpPr>
+        <p:spPr>
+          <a:xfrm>
+            <a:off x="14767559" y="5166360"/>
+            <a:ext cx="2560320" cy="1325880"/>
+          </a:xfrm>
+          <a:prstGeom prst="rect">
+            <a:avLst/>
+          </a:prstGeom>
+          <a:noFill/>
+        </p:spPr>
+        <p:txBody>
+          <a:bodyPr wrap="square" anchor="t" lIns="0" rIns="0" tIns="0" bIns="0">
+            <a:spAutoFit/>
+          </a:bodyPr>
+          <a:lstStyle/>
+          <a:p>
+            <a:pPr algn="l"/>
+            <a:r>
+              <a:rPr sz="1600" b="1">
+                <a:solidFill>
+                  <a:srgbClr val="C05621"/>
+                </a:solidFill>
+                <a:latin typeface="Malgun Gothic"/>
+                <a:ea typeface="Malgun Gothic"/>
+                <a:cs typeface="Malgun Gothic"/>
+              </a:rPr>
+              <a:t>DHT11</a:t>
+            </a:r>
+          </a:p>
+          <a:p>
+            <a:pPr algn="l"/>
+            <a:r>
+              <a:rPr sz="2400" b="1">
+                <a:solidFill>
+                  <a:srgbClr val="262626"/>
+                </a:solidFill>
+                <a:latin typeface="Malgun Gothic"/>
+                <a:ea typeface="Malgun Gothic"/>
+                <a:cs typeface="Malgun Gothic"/>
+              </a:rPr>
+              <a:t>±5 %RH</a:t>
+            </a:r>
+          </a:p>
+          <a:p>
+            <a:pPr algn="l"/>
+            <a:r>
+              <a:rPr sz="1800" b="1">
+                <a:solidFill>
+                  <a:srgbClr val="262626"/>
+                </a:solidFill>
+                <a:latin typeface="Malgun Gothic"/>
+                <a:ea typeface="Malgun Gothic"/>
+                <a:cs typeface="Malgun Gothic"/>
+              </a:rPr>
+              <a:t>±2 ℃ (25 ℃ 기준)</a:t>
+            </a:r>
+          </a:p>
+        </p:txBody>
+      </p:sp>
+      <p:sp>
+        <p:nvSpPr>
+          <p:cNvPr id="166" name="TextBox 165"/>
+          <p:cNvSpPr txBox="1"/>
+          <p:nvPr/>
+        </p:nvSpPr>
+        <p:spPr>
+          <a:xfrm>
+            <a:off x="14767559" y="7040880"/>
+            <a:ext cx="2560320" cy="548640"/>
+          </a:xfrm>
+          <a:prstGeom prst="rect">
+            <a:avLst/>
+          </a:prstGeom>
+          <a:noFill/>
+        </p:spPr>
+        <p:txBody>
+          <a:bodyPr wrap="square" anchor="ctr" lIns="0" rIns="0" tIns="0" bIns="0">
+            <a:spAutoFit/>
+          </a:bodyPr>
+          <a:lstStyle/>
+          <a:p>
+            <a:pPr algn="l"/>
+            <a:r>
+              <a:rPr sz="1500" b="0">
+                <a:solidFill>
+                  <a:srgbClr val="595959"/>
+                </a:solidFill>
+                <a:latin typeface="Malgun Gothic"/>
+                <a:ea typeface="Malgun Gothic"/>
+                <a:cs typeface="Malgun Gothic"/>
+              </a:rPr>
+              <a:t>실측 오차 </a:t>
+            </a:r>
+            <a:r>
+              <a:rPr sz="1500" b="1">
+                <a:solidFill>
+                  <a:srgbClr val="C00000"/>
+                </a:solidFill>
+                <a:latin typeface="Malgun Gothic"/>
+                <a:ea typeface="Malgun Gothic"/>
+                <a:cs typeface="Malgun Gothic"/>
+              </a:rPr>
+              <a:t>미측정</a:t>
+            </a:r>
+          </a:p>
+        </p:txBody>
+      </p:sp>
+      <p:cxnSp>
+        <p:nvCxnSpPr>
+          <p:cNvPr id="167" name="Connector 166"/>
+          <p:cNvCxnSpPr/>
+          <p:nvPr/>
+        </p:nvCxnSpPr>
+        <p:spPr>
+          <a:xfrm>
+            <a:off x="12554712" y="4434840"/>
+            <a:ext cx="1911096" cy="0"/>
+          </a:xfrm>
+          <a:prstGeom prst="line">
+            <a:avLst/>
+          </a:prstGeom>
+          <a:ln w="38100">
+            <a:solidFill>
+              <a:srgbClr val="2F855A"/>
+            </a:solidFill>
+            <a:headEnd type="triangle" w="med" len="med"/>
+            <a:tailEnd type="triangle" w="med" len="med"/>
+          </a:ln>
+        </p:spPr>
+        <p:style>
+          <a:lnRef idx="2">
+            <a:schemeClr val="accent1"/>
+          </a:lnRef>
+          <a:fillRef idx="0">
+            <a:schemeClr val="accent1"/>
+          </a:fillRef>
+          <a:effectRef idx="1">
+            <a:schemeClr val="accent1"/>
+          </a:effectRef>
+          <a:fontRef idx="minor">
+            <a:schemeClr val="tx1"/>
+          </a:fontRef>
+        </p:style>
+      </p:cxnSp>
+      <p:sp>
+        <p:nvSpPr>
+          <p:cNvPr id="168" name="TextBox 167"/>
+          <p:cNvSpPr txBox="1"/>
+          <p:nvPr/>
+        </p:nvSpPr>
+        <p:spPr>
+          <a:xfrm>
+            <a:off x="12573000" y="4050791"/>
+            <a:ext cx="1874519" cy="310896"/>
+          </a:xfrm>
+          <a:prstGeom prst="rect">
+            <a:avLst/>
+          </a:prstGeom>
+          <a:noFill/>
+        </p:spPr>
+        <p:txBody>
+          <a:bodyPr wrap="square" anchor="ctr" lIns="0" rIns="0" tIns="0" bIns="0">
+            <a:spAutoFit/>
+          </a:bodyPr>
+          <a:lstStyle/>
+          <a:p>
+            <a:pPr algn="ctr"/>
+            <a:r>
+              <a:rPr sz="1400" b="1">
+                <a:solidFill>
+                  <a:srgbClr val="2F855A"/>
+                </a:solidFill>
+                <a:latin typeface="Malgun Gothic"/>
+                <a:ea typeface="Malgun Gothic"/>
+                <a:cs typeface="Malgun Gothic"/>
+              </a:rPr>
+              <a:t>trig · echo</a:t>
+            </a:r>
+          </a:p>
+        </p:txBody>
+      </p:sp>
+      <p:cxnSp>
+        <p:nvCxnSpPr>
+          <p:cNvPr id="169" name="Connector 168"/>
+          <p:cNvCxnSpPr/>
+          <p:nvPr/>
+        </p:nvCxnSpPr>
+        <p:spPr>
+          <a:xfrm>
+            <a:off x="12554712" y="5806440"/>
+            <a:ext cx="1911096" cy="0"/>
+          </a:xfrm>
+          <a:prstGeom prst="line">
+            <a:avLst/>
+          </a:prstGeom>
+          <a:ln w="38100">
+            <a:solidFill>
+              <a:srgbClr val="C05621"/>
+            </a:solidFill>
+            <a:headEnd type="triangle" w="med" len="med"/>
+            <a:tailEnd type="triangle" w="med" len="med"/>
+          </a:ln>
+        </p:spPr>
+        <p:style>
+          <a:lnRef idx="2">
+            <a:schemeClr val="accent1"/>
+          </a:lnRef>
+          <a:fillRef idx="0">
+            <a:schemeClr val="accent1"/>
+          </a:fillRef>
+          <a:effectRef idx="1">
+            <a:schemeClr val="accent1"/>
+          </a:effectRef>
+          <a:fontRef idx="minor">
+            <a:schemeClr val="tx1"/>
+          </a:fontRef>
+        </p:style>
+      </p:cxnSp>
+      <p:sp>
+        <p:nvSpPr>
+          <p:cNvPr id="170" name="TextBox 169"/>
+          <p:cNvSpPr txBox="1"/>
+          <p:nvPr/>
+        </p:nvSpPr>
+        <p:spPr>
+          <a:xfrm>
+            <a:off x="12573000" y="5422392"/>
+            <a:ext cx="1874519" cy="310896"/>
+          </a:xfrm>
+          <a:prstGeom prst="rect">
+            <a:avLst/>
+          </a:prstGeom>
+          <a:noFill/>
+        </p:spPr>
+        <p:txBody>
+          <a:bodyPr wrap="square" anchor="ctr" lIns="0" rIns="0" tIns="0" bIns="0">
+            <a:spAutoFit/>
+          </a:bodyPr>
+          <a:lstStyle/>
+          <a:p>
+            <a:pPr algn="ctr"/>
+            <a:r>
+              <a:rPr sz="1400" b="1">
+                <a:solidFill>
+                  <a:srgbClr val="C05621"/>
+                </a:solidFill>
+                <a:latin typeface="Malgun Gothic"/>
+                <a:ea typeface="Malgun Gothic"/>
+                <a:cs typeface="Malgun Gothic"/>
+              </a:rPr>
+              <a:t>data</a:t>
+            </a:r>
+          </a:p>
+        </p:txBody>
+      </p:sp>
+      <p:sp>
+        <p:nvSpPr>
+          <p:cNvPr id="171" name="Rounded Rectangle 170"/>
+          <p:cNvSpPr/>
+          <p:nvPr/>
+        </p:nvSpPr>
+        <p:spPr>
+          <a:xfrm>
+            <a:off x="841248" y="8503920"/>
+            <a:ext cx="16623792" cy="1005840"/>
+          </a:xfrm>
+          <a:prstGeom prst="roundRect">
+            <a:avLst>
+              <a:gd name="adj" fmla="val 12000"/>
+            </a:avLst>
+          </a:prstGeom>
+          <a:solidFill>
+            <a:srgbClr val="F4F4F4"/>
+          </a:solidFill>
+          <a:ln>
+            <a:noFill/>
+          </a:ln>
+          <a:effectLst/>
+        </p:spPr>
+        <p:style>
+          <a:lnRef idx="1">
+            <a:schemeClr val="accent1"/>
+          </a:lnRef>
+          <a:fillRef idx="3">
+            <a:schemeClr val="accent1"/>
+          </a:fillRef>
+          <a:effectRef idx="2">
+            <a:schemeClr val="accent1"/>
+          </a:effectRef>
+          <a:fontRef idx="minor">
+            <a:schemeClr val="lt1"/>
+          </a:fontRef>
+        </p:style>
+        <p:txBody>
+          <a:bodyPr rtlCol="0" anchor="ctr" wrap="square" lIns="0" rIns="0" tIns="0" bIns="0"/>
+          <a:lstStyle/>
+          <a:p>
+            <a:pPr algn="l"/>
+            <a:r>
+              <a:rPr sz="1000" b="0">
+                <a:solidFill>
+                  <a:srgbClr val="262626"/>
+                </a:solidFill>
+                <a:latin typeface="Malgun Gothic"/>
+                <a:ea typeface="Malgun Gothic"/>
+                <a:cs typeface="Malgun Gothic"/>
+              </a:rPr>
+              <a:t/>
+            </a:r>
+          </a:p>
+        </p:txBody>
+      </p:sp>
+      <p:sp>
+        <p:nvSpPr>
+          <p:cNvPr id="172" name="Oval 171"/>
+          <p:cNvSpPr/>
+          <p:nvPr/>
+        </p:nvSpPr>
+        <p:spPr>
+          <a:xfrm>
+            <a:off x="1051560" y="8796528"/>
+            <a:ext cx="420624" cy="420624"/>
+          </a:xfrm>
+          <a:prstGeom prst="ellipse">
+            <a:avLst/>
+          </a:prstGeom>
+          <a:solidFill>
+            <a:srgbClr val="404040"/>
+          </a:solidFill>
+          <a:ln>
+            <a:noFill/>
+          </a:ln>
+          <a:effectLst/>
+        </p:spPr>
+        <p:style>
+          <a:lnRef idx="1">
+            <a:schemeClr val="accent1"/>
+          </a:lnRef>
+          <a:fillRef idx="3">
+            <a:schemeClr val="accent1"/>
+          </a:fillRef>
+          <a:effectRef idx="2">
+            <a:schemeClr val="accent1"/>
+          </a:effectRef>
+          <a:fontRef idx="minor">
+            <a:schemeClr val="lt1"/>
+          </a:fontRef>
+        </p:style>
+        <p:txBody>
+          <a:bodyPr rtlCol="0" anchor="ctr" wrap="square" lIns="0" rIns="0" tIns="0" bIns="0"/>
+          <a:lstStyle/>
+          <a:p>
+            <a:pPr algn="ctr"/>
+            <a:r>
+              <a:rPr sz="1600" b="1">
+                <a:solidFill>
+                  <a:srgbClr val="FFFFFF"/>
+                </a:solidFill>
+                <a:latin typeface="Malgun Gothic"/>
+                <a:ea typeface="Malgun Gothic"/>
+                <a:cs typeface="Malgun Gothic"/>
+              </a:rPr>
+              <a:t>7</a:t>
+            </a:r>
+          </a:p>
+        </p:txBody>
+      </p:sp>
+      <p:sp>
+        <p:nvSpPr>
+          <p:cNvPr id="173" name="TextBox 172"/>
+          <p:cNvSpPr txBox="1"/>
+          <p:nvPr/>
+        </p:nvSpPr>
+        <p:spPr>
+          <a:xfrm>
+            <a:off x="1600200" y="8641080"/>
+            <a:ext cx="3291840" cy="731520"/>
+          </a:xfrm>
+          <a:prstGeom prst="rect">
+            <a:avLst/>
+          </a:prstGeom>
+          <a:noFill/>
+        </p:spPr>
+        <p:txBody>
+          <a:bodyPr wrap="square" anchor="ctr" lIns="0" rIns="0" tIns="0" bIns="0">
+            <a:spAutoFit/>
+          </a:bodyPr>
+          <a:lstStyle/>
+          <a:p>
+            <a:pPr algn="l"/>
+            <a:r>
+              <a:rPr sz="1700" b="1">
+                <a:solidFill>
+                  <a:srgbClr val="262626"/>
+                </a:solidFill>
+                <a:latin typeface="Malgun Gothic"/>
+                <a:ea typeface="Malgun Gothic"/>
+                <a:cs typeface="Malgun Gothic"/>
+              </a:rPr>
+              <a:t>FPGA 자원 · 타이밍</a:t>
+            </a:r>
+          </a:p>
+          <a:p>
+            <a:pPr algn="l"/>
+            <a:r>
+              <a:rPr sz="1200" b="0">
+                <a:solidFill>
+                  <a:srgbClr val="595959"/>
+                </a:solidFill>
+                <a:latin typeface="Malgun Gothic"/>
+                <a:ea typeface="Malgun Gothic"/>
+                <a:cs typeface="Malgun Gothic"/>
+              </a:rPr>
+              <a:t>구현 결과 · Vivado 2022.2 · v2</a:t>
+            </a:r>
+          </a:p>
+        </p:txBody>
+      </p:sp>
+      <p:sp>
+        <p:nvSpPr>
+          <p:cNvPr id="174" name="TextBox 173"/>
+          <p:cNvSpPr txBox="1"/>
+          <p:nvPr/>
+        </p:nvSpPr>
+        <p:spPr>
+          <a:xfrm>
+            <a:off x="5120640" y="8503920"/>
+            <a:ext cx="3017520" cy="1005840"/>
+          </a:xfrm>
+          <a:prstGeom prst="rect">
+            <a:avLst/>
+          </a:prstGeom>
+          <a:noFill/>
+        </p:spPr>
+        <p:txBody>
+          <a:bodyPr wrap="square" anchor="ctr" lIns="0" rIns="0" tIns="0" bIns="0">
+            <a:spAutoFit/>
+          </a:bodyPr>
+          <a:lstStyle/>
+          <a:p>
+            <a:pPr algn="l"/>
+            <a:r>
+              <a:rPr sz="1600" b="0">
+                <a:solidFill>
+                  <a:srgbClr val="595959"/>
+                </a:solidFill>
+                <a:latin typeface="Malgun Gothic"/>
+                <a:ea typeface="Malgun Gothic"/>
+                <a:cs typeface="Malgun Gothic"/>
+              </a:rPr>
+              <a:t>LUT </a:t>
+            </a:r>
+            <a:r>
+              <a:rPr sz="2400" b="1">
+                <a:solidFill>
+                  <a:srgbClr val="262626"/>
+                </a:solidFill>
+                <a:latin typeface="Malgun Gothic"/>
+                <a:ea typeface="Malgun Gothic"/>
+                <a:cs typeface="Malgun Gothic"/>
+              </a:rPr>
+              <a:t>1,489</a:t>
+            </a:r>
+            <a:r>
+              <a:rPr sz="1600" b="0">
+                <a:solidFill>
+                  <a:srgbClr val="595959"/>
+                </a:solidFill>
+                <a:latin typeface="Malgun Gothic"/>
+                <a:ea typeface="Malgun Gothic"/>
+                <a:cs typeface="Malgun Gothic"/>
+              </a:rPr>
+              <a:t>  7.2 %</a:t>
+            </a:r>
+          </a:p>
+        </p:txBody>
+      </p:sp>
+      <p:sp>
+        <p:nvSpPr>
+          <p:cNvPr id="175" name="TextBox 174"/>
+          <p:cNvSpPr txBox="1"/>
+          <p:nvPr/>
+        </p:nvSpPr>
+        <p:spPr>
+          <a:xfrm>
+            <a:off x="8321040" y="8503920"/>
+            <a:ext cx="2560320" cy="1005840"/>
+          </a:xfrm>
+          <a:prstGeom prst="rect">
+            <a:avLst/>
+          </a:prstGeom>
+          <a:noFill/>
+        </p:spPr>
+        <p:txBody>
+          <a:bodyPr wrap="square" anchor="ctr" lIns="0" rIns="0" tIns="0" bIns="0">
+            <a:spAutoFit/>
+          </a:bodyPr>
+          <a:lstStyle/>
+          <a:p>
+            <a:pPr algn="l"/>
+            <a:r>
+              <a:rPr sz="1600" b="0">
+                <a:solidFill>
+                  <a:srgbClr val="595959"/>
+                </a:solidFill>
+                <a:latin typeface="Malgun Gothic"/>
+                <a:ea typeface="Malgun Gothic"/>
+                <a:cs typeface="Malgun Gothic"/>
+              </a:rPr>
+              <a:t>FF </a:t>
+            </a:r>
+            <a:r>
+              <a:rPr sz="2400" b="1">
+                <a:solidFill>
+                  <a:srgbClr val="262626"/>
+                </a:solidFill>
+                <a:latin typeface="Malgun Gothic"/>
+                <a:ea typeface="Malgun Gothic"/>
+                <a:cs typeface="Malgun Gothic"/>
+              </a:rPr>
+              <a:t>737</a:t>
+            </a:r>
+            <a:r>
+              <a:rPr sz="1600" b="0">
+                <a:solidFill>
+                  <a:srgbClr val="595959"/>
+                </a:solidFill>
+                <a:latin typeface="Malgun Gothic"/>
+                <a:ea typeface="Malgun Gothic"/>
+                <a:cs typeface="Malgun Gothic"/>
+              </a:rPr>
+              <a:t>  1.8 %</a:t>
+            </a:r>
+          </a:p>
+        </p:txBody>
+      </p:sp>
+      <p:sp>
+        <p:nvSpPr>
+          <p:cNvPr id="176" name="TextBox 175"/>
+          <p:cNvSpPr txBox="1"/>
+          <p:nvPr/>
+        </p:nvSpPr>
+        <p:spPr>
+          <a:xfrm>
+            <a:off x="11064240" y="8503920"/>
+            <a:ext cx="3749039" cy="1005840"/>
+          </a:xfrm>
+          <a:prstGeom prst="rect">
+            <a:avLst/>
+          </a:prstGeom>
+          <a:noFill/>
+        </p:spPr>
+        <p:txBody>
+          <a:bodyPr wrap="square" anchor="ctr" lIns="0" rIns="0" tIns="0" bIns="0">
+            <a:spAutoFit/>
+          </a:bodyPr>
+          <a:lstStyle/>
+          <a:p>
+            <a:pPr algn="l"/>
+            <a:r>
+              <a:rPr sz="1600" b="0">
+                <a:solidFill>
+                  <a:srgbClr val="595959"/>
+                </a:solidFill>
+                <a:latin typeface="Malgun Gothic"/>
+                <a:ea typeface="Malgun Gothic"/>
+                <a:cs typeface="Malgun Gothic"/>
+              </a:rPr>
+              <a:t>WNS </a:t>
+            </a:r>
+            <a:r>
+              <a:rPr sz="2400" b="1">
+                <a:solidFill>
+                  <a:srgbClr val="262626"/>
+                </a:solidFill>
+                <a:latin typeface="Malgun Gothic"/>
+                <a:ea typeface="Malgun Gothic"/>
+                <a:cs typeface="Malgun Gothic"/>
+              </a:rPr>
+              <a:t>+0.320 ns</a:t>
+            </a:r>
+            <a:r>
+              <a:rPr sz="1600" b="0">
+                <a:solidFill>
+                  <a:srgbClr val="595959"/>
+                </a:solidFill>
+                <a:latin typeface="Malgun Gothic"/>
+                <a:ea typeface="Malgun Gothic"/>
+                <a:cs typeface="Malgun Gothic"/>
+              </a:rPr>
+              <a:t>  위반 0</a:t>
+            </a:r>
+          </a:p>
+        </p:txBody>
+      </p:sp>
+      <p:sp>
+        <p:nvSpPr>
+          <p:cNvPr id="177" name="TextBox 176"/>
+          <p:cNvSpPr txBox="1"/>
+          <p:nvPr/>
+        </p:nvSpPr>
+        <p:spPr>
+          <a:xfrm>
+            <a:off x="14996159" y="8503920"/>
+            <a:ext cx="2377440" cy="1005840"/>
+          </a:xfrm>
+          <a:prstGeom prst="rect">
+            <a:avLst/>
+          </a:prstGeom>
+          <a:noFill/>
+        </p:spPr>
+        <p:txBody>
+          <a:bodyPr wrap="square" anchor="ctr" lIns="0" rIns="0" tIns="0" bIns="0">
+            <a:spAutoFit/>
+          </a:bodyPr>
+          <a:lstStyle/>
+          <a:p>
+            <a:pPr algn="l"/>
+            <a:r>
+              <a:rPr sz="1600" b="0">
+                <a:solidFill>
+                  <a:srgbClr val="595959"/>
+                </a:solidFill>
+                <a:latin typeface="Malgun Gothic"/>
+                <a:ea typeface="Malgun Gothic"/>
+                <a:cs typeface="Malgun Gothic"/>
+              </a:rPr>
+              <a:t>전력 </a:t>
+            </a:r>
+            <a:r>
+              <a:rPr sz="2000" b="1">
+                <a:solidFill>
+                  <a:srgbClr val="C00000"/>
+                </a:solidFill>
+                <a:latin typeface="Malgun Gothic"/>
+                <a:ea typeface="Malgun Gothic"/>
+                <a:cs typeface="Malgun Gothic"/>
+              </a:rPr>
+              <a:t>미측정</a:t>
+            </a:r>
+          </a:p>
+        </p:txBody>
+      </p:sp>
+    </p:spTree>
+  </p:cSld>
+  <p:clrMapOvr>
+    <a:masterClrMapping/>
+  </p:clrMapOvr>
+</p:sld>
+</file>
+
+<file path=ppt/slides/slide4.xml><?xml version="1.0" encoding="utf-8"?>
 <p:sld xmlns:a="http://schemas.openxmlformats.org/drawingml/2006/main" xmlns:r="http://schemas.openxmlformats.org/officeDocument/2006/relationships" xmlns:p="http://schemas.openxmlformats.org/presentationml/2006/main">
   <p:cSld>
     <p:spTree>
@@ -6574,7 +9427,7 @@
                 <a:ea typeface="Malgun Gothic"/>
                 <a:cs typeface="Malgun Gothic"/>
               </a:rPr>
-              <a:t>03</a:t>
+              <a:t>04</a:t>
             </a:r>
             <a:endParaRPr lang="ko-KR" sz="1100" dirty="0"/>
           </a:p>
@@ -6597,7 +9450,7 @@
           <a:noFill/>
         </p:spPr>
         <p:txBody>
-          <a:bodyPr wrap="square" anchor="ctr" lIns="36576" rIns="36576" tIns="0" bIns="0">
+          <a:bodyPr wrap="square" lIns="36576" tIns="0" rIns="36576" bIns="0" anchor="ctr">
             <a:spAutoFit/>
           </a:bodyPr>
           <a:lstStyle/>
@@ -6660,6 +9513,7 @@
           <a:lstStyle/>
           <a:p>
             <a:pPr algn="ctr"/>
+            <a:endParaRPr/>
           </a:p>
         </p:txBody>
       </p:sp>
@@ -6706,6 +9560,7 @@
           <a:lstStyle/>
           <a:p>
             <a:pPr algn="ctr"/>
+            <a:endParaRPr/>
           </a:p>
         </p:txBody>
       </p:sp>
@@ -6726,7 +9581,7 @@
           <a:noFill/>
         </p:spPr>
         <p:txBody>
-          <a:bodyPr wrap="square" anchor="ctr" lIns="54864" rIns="54864" tIns="0" bIns="0">
+          <a:bodyPr wrap="square" lIns="54864" tIns="0" rIns="54864" bIns="0" anchor="ctr">
             <a:spAutoFit/>
           </a:bodyPr>
           <a:lstStyle/>
@@ -6763,7 +9618,7 @@
           <a:noFill/>
         </p:spPr>
         <p:txBody>
-          <a:bodyPr wrap="square" anchor="ctr" lIns="36576" rIns="36576" tIns="0" bIns="0">
+          <a:bodyPr wrap="square" lIns="36576" tIns="0" rIns="36576" bIns="0" anchor="ctr">
             <a:spAutoFit/>
           </a:bodyPr>
           <a:lstStyle/>
@@ -6826,6 +9681,7 @@
           <a:lstStyle/>
           <a:p>
             <a:pPr algn="ctr"/>
+            <a:endParaRPr/>
           </a:p>
         </p:txBody>
       </p:sp>
@@ -6872,6 +9728,7 @@
           <a:lstStyle/>
           <a:p>
             <a:pPr algn="ctr"/>
+            <a:endParaRPr/>
           </a:p>
         </p:txBody>
       </p:sp>
@@ -6916,7 +9773,7 @@
           </a:fontRef>
         </p:style>
         <p:txBody>
-          <a:bodyPr rtlCol="0" anchor="ctr" wrap="square" lIns="54864" rIns="54864" tIns="0" bIns="0"/>
+          <a:bodyPr wrap="square" lIns="54864" tIns="0" rIns="54864" bIns="0" rtlCol="0" anchor="ctr"/>
           <a:lstStyle/>
           <a:p>
             <a:pPr algn="l"/>
@@ -6951,7 +9808,7 @@
           <a:noFill/>
         </p:spPr>
         <p:txBody>
-          <a:bodyPr wrap="square" anchor="ctr" lIns="36576" rIns="36576" tIns="0" bIns="0">
+          <a:bodyPr wrap="square" lIns="36576" tIns="0" rIns="36576" bIns="0" anchor="ctr">
             <a:spAutoFit/>
           </a:bodyPr>
           <a:lstStyle/>
@@ -7014,6 +9871,7 @@
           <a:lstStyle/>
           <a:p>
             <a:pPr algn="ctr"/>
+            <a:endParaRPr/>
           </a:p>
         </p:txBody>
       </p:sp>
@@ -7060,6 +9918,7 @@
           <a:lstStyle/>
           <a:p>
             <a:pPr algn="ctr"/>
+            <a:endParaRPr/>
           </a:p>
         </p:txBody>
       </p:sp>
@@ -7080,7 +9939,7 @@
           <a:noFill/>
         </p:spPr>
         <p:txBody>
-          <a:bodyPr wrap="square" anchor="ctr" lIns="54864" rIns="54864" tIns="0" bIns="0">
+          <a:bodyPr wrap="square" lIns="54864" tIns="0" rIns="54864" bIns="0" anchor="ctr">
             <a:spAutoFit/>
           </a:bodyPr>
           <a:lstStyle/>
@@ -7117,7 +9976,7 @@
           <a:noFill/>
         </p:spPr>
         <p:txBody>
-          <a:bodyPr wrap="square" anchor="ctr" lIns="36576" rIns="36576" tIns="0" bIns="0">
+          <a:bodyPr wrap="square" lIns="36576" tIns="0" rIns="36576" bIns="0" anchor="ctr">
             <a:spAutoFit/>
           </a:bodyPr>
           <a:lstStyle/>
@@ -7180,6 +10039,7 @@
           <a:lstStyle/>
           <a:p>
             <a:pPr algn="ctr"/>
+            <a:endParaRPr/>
           </a:p>
         </p:txBody>
       </p:sp>
@@ -7226,6 +10086,7 @@
           <a:lstStyle/>
           <a:p>
             <a:pPr algn="ctr"/>
+            <a:endParaRPr/>
           </a:p>
         </p:txBody>
       </p:sp>
@@ -7246,7 +10107,7 @@
           <a:noFill/>
         </p:spPr>
         <p:txBody>
-          <a:bodyPr wrap="square" anchor="ctr" lIns="54864" rIns="54864" tIns="0" bIns="0">
+          <a:bodyPr wrap="square" lIns="54864" tIns="0" rIns="54864" bIns="0" anchor="ctr">
             <a:spAutoFit/>
           </a:bodyPr>
           <a:lstStyle/>
@@ -7283,7 +10144,7 @@
           <a:noFill/>
         </p:spPr>
         <p:txBody>
-          <a:bodyPr wrap="square" anchor="ctr" lIns="36576" rIns="36576" tIns="0" bIns="0">
+          <a:bodyPr wrap="square" lIns="36576" tIns="0" rIns="36576" bIns="0" anchor="ctr">
             <a:spAutoFit/>
           </a:bodyPr>
           <a:lstStyle/>
@@ -7346,6 +10207,7 @@
           <a:lstStyle/>
           <a:p>
             <a:pPr algn="ctr"/>
+            <a:endParaRPr/>
           </a:p>
         </p:txBody>
       </p:sp>
@@ -7392,6 +10254,7 @@
           <a:lstStyle/>
           <a:p>
             <a:pPr algn="ctr"/>
+            <a:endParaRPr/>
           </a:p>
         </p:txBody>
       </p:sp>
@@ -7436,7 +10299,7 @@
           </a:fontRef>
         </p:style>
         <p:txBody>
-          <a:bodyPr rtlCol="0" anchor="ctr" wrap="square" lIns="54864" rIns="54864" tIns="0" bIns="0"/>
+          <a:bodyPr wrap="square" lIns="54864" tIns="0" rIns="54864" bIns="0" rtlCol="0" anchor="ctr"/>
           <a:lstStyle/>
           <a:p>
             <a:pPr algn="l"/>
@@ -7471,7 +10334,7 @@
           <a:noFill/>
         </p:spPr>
         <p:txBody>
-          <a:bodyPr wrap="square" anchor="ctr" lIns="36576" rIns="36576" tIns="0" bIns="0">
+          <a:bodyPr wrap="square" lIns="36576" tIns="0" rIns="36576" bIns="0" anchor="ctr">
             <a:spAutoFit/>
           </a:bodyPr>
           <a:lstStyle/>
@@ -7534,6 +10397,7 @@
           <a:lstStyle/>
           <a:p>
             <a:pPr algn="ctr"/>
+            <a:endParaRPr/>
           </a:p>
         </p:txBody>
       </p:sp>
@@ -7580,6 +10444,7 @@
           <a:lstStyle/>
           <a:p>
             <a:pPr algn="ctr"/>
+            <a:endParaRPr/>
           </a:p>
         </p:txBody>
       </p:sp>
@@ -7624,7 +10489,7 @@
           </a:fontRef>
         </p:style>
         <p:txBody>
-          <a:bodyPr rtlCol="0" anchor="ctr" wrap="square" lIns="54864" rIns="54864" tIns="0" bIns="0"/>
+          <a:bodyPr wrap="square" lIns="54864" tIns="0" rIns="54864" bIns="0" rtlCol="0" anchor="ctr"/>
           <a:lstStyle/>
           <a:p>
             <a:pPr algn="l"/>
@@ -7659,7 +10524,7 @@
           <a:noFill/>
         </p:spPr>
         <p:txBody>
-          <a:bodyPr wrap="square" anchor="ctr" lIns="36576" rIns="36576" tIns="0" bIns="0">
+          <a:bodyPr wrap="square" lIns="36576" tIns="0" rIns="36576" bIns="0" anchor="ctr">
             <a:spAutoFit/>
           </a:bodyPr>
           <a:lstStyle/>
@@ -7722,6 +10587,7 @@
           <a:lstStyle/>
           <a:p>
             <a:pPr algn="ctr"/>
+            <a:endParaRPr/>
           </a:p>
         </p:txBody>
       </p:sp>
@@ -7768,6 +10634,7 @@
           <a:lstStyle/>
           <a:p>
             <a:pPr algn="ctr"/>
+            <a:endParaRPr/>
           </a:p>
         </p:txBody>
       </p:sp>
@@ -7812,7 +10679,7 @@
           </a:fontRef>
         </p:style>
         <p:txBody>
-          <a:bodyPr rtlCol="0" anchor="ctr" wrap="square" lIns="54864" rIns="54864" tIns="0" bIns="0"/>
+          <a:bodyPr wrap="square" lIns="54864" tIns="0" rIns="54864" bIns="0" rtlCol="0" anchor="ctr"/>
           <a:lstStyle/>
           <a:p>
             <a:pPr algn="l"/>
@@ -7847,7 +10714,7 @@
           <a:noFill/>
         </p:spPr>
         <p:txBody>
-          <a:bodyPr wrap="square" anchor="ctr" lIns="36576" rIns="36576" tIns="0" bIns="0">
+          <a:bodyPr wrap="square" lIns="36576" tIns="0" rIns="36576" bIns="0" anchor="ctr">
             <a:spAutoFit/>
           </a:bodyPr>
           <a:lstStyle/>
@@ -7910,6 +10777,7 @@
           <a:lstStyle/>
           <a:p>
             <a:pPr algn="ctr"/>
+            <a:endParaRPr/>
           </a:p>
         </p:txBody>
       </p:sp>
@@ -7956,6 +10824,7 @@
           <a:lstStyle/>
           <a:p>
             <a:pPr algn="ctr"/>
+            <a:endParaRPr/>
           </a:p>
         </p:txBody>
       </p:sp>
@@ -8000,7 +10869,7 @@
           </a:fontRef>
         </p:style>
         <p:txBody>
-          <a:bodyPr rtlCol="0" anchor="ctr" wrap="square" lIns="54864" rIns="54864" tIns="0" bIns="0"/>
+          <a:bodyPr wrap="square" lIns="54864" tIns="0" rIns="54864" bIns="0" rtlCol="0" anchor="ctr"/>
           <a:lstStyle/>
           <a:p>
             <a:pPr algn="l"/>
@@ -8035,7 +10904,7 @@
           <a:noFill/>
         </p:spPr>
         <p:txBody>
-          <a:bodyPr wrap="square" anchor="ctr" lIns="36576" rIns="36576" tIns="0" bIns="0">
+          <a:bodyPr wrap="square" lIns="36576" tIns="0" rIns="36576" bIns="0" anchor="ctr">
             <a:spAutoFit/>
           </a:bodyPr>
           <a:lstStyle/>
@@ -8098,6 +10967,7 @@
           <a:lstStyle/>
           <a:p>
             <a:pPr algn="ctr"/>
+            <a:endParaRPr/>
           </a:p>
         </p:txBody>
       </p:sp>
@@ -8144,6 +11014,7 @@
           <a:lstStyle/>
           <a:p>
             <a:pPr algn="ctr"/>
+            <a:endParaRPr/>
           </a:p>
         </p:txBody>
       </p:sp>
@@ -8164,7 +11035,7 @@
           <a:noFill/>
         </p:spPr>
         <p:txBody>
-          <a:bodyPr wrap="square" anchor="ctr" lIns="54864" rIns="54864" tIns="0" bIns="0">
+          <a:bodyPr wrap="square" lIns="54864" tIns="0" rIns="54864" bIns="0" anchor="ctr">
             <a:spAutoFit/>
           </a:bodyPr>
           <a:lstStyle/>
@@ -8201,7 +11072,7 @@
           <a:noFill/>
         </p:spPr>
         <p:txBody>
-          <a:bodyPr wrap="square" anchor="ctr" lIns="36576" rIns="36576" tIns="0" bIns="0">
+          <a:bodyPr wrap="square" lIns="36576" tIns="0" rIns="36576" bIns="0" anchor="ctr">
             <a:spAutoFit/>
           </a:bodyPr>
           <a:lstStyle/>
@@ -8264,6 +11135,7 @@
           <a:lstStyle/>
           <a:p>
             <a:pPr algn="ctr"/>
+            <a:endParaRPr/>
           </a:p>
         </p:txBody>
       </p:sp>
@@ -8310,6 +11182,7 @@
           <a:lstStyle/>
           <a:p>
             <a:pPr algn="ctr"/>
+            <a:endParaRPr/>
           </a:p>
         </p:txBody>
       </p:sp>
@@ -8354,7 +11227,7 @@
           </a:fontRef>
         </p:style>
         <p:txBody>
-          <a:bodyPr rtlCol="0" anchor="ctr" wrap="square" lIns="54864" rIns="54864" tIns="0" bIns="0"/>
+          <a:bodyPr wrap="square" lIns="54864" tIns="0" rIns="54864" bIns="0" rtlCol="0" anchor="ctr"/>
           <a:lstStyle/>
           <a:p>
             <a:pPr algn="l"/>
@@ -8389,7 +11262,7 @@
           <a:noFill/>
         </p:spPr>
         <p:txBody>
-          <a:bodyPr wrap="square" anchor="ctr" lIns="36576" rIns="36576" tIns="0" bIns="0">
+          <a:bodyPr wrap="square" lIns="36576" tIns="0" rIns="36576" bIns="0" anchor="ctr">
             <a:spAutoFit/>
           </a:bodyPr>
           <a:lstStyle/>
@@ -8452,6 +11325,7 @@
           <a:lstStyle/>
           <a:p>
             <a:pPr algn="ctr"/>
+            <a:endParaRPr/>
           </a:p>
         </p:txBody>
       </p:sp>
@@ -8498,6 +11372,7 @@
           <a:lstStyle/>
           <a:p>
             <a:pPr algn="ctr"/>
+            <a:endParaRPr/>
           </a:p>
         </p:txBody>
       </p:sp>
@@ -8518,7 +11393,7 @@
           <a:noFill/>
         </p:spPr>
         <p:txBody>
-          <a:bodyPr wrap="square" anchor="ctr" lIns="54864" rIns="54864" tIns="0" bIns="0">
+          <a:bodyPr wrap="square" lIns="54864" tIns="0" rIns="54864" bIns="0" anchor="ctr">
             <a:spAutoFit/>
           </a:bodyPr>
           <a:lstStyle/>
@@ -8555,7 +11430,7 @@
           <a:noFill/>
         </p:spPr>
         <p:txBody>
-          <a:bodyPr wrap="square" anchor="ctr" lIns="36576" rIns="36576" tIns="0" bIns="0">
+          <a:bodyPr wrap="square" lIns="36576" tIns="0" rIns="36576" bIns="0" anchor="ctr">
             <a:spAutoFit/>
           </a:bodyPr>
           <a:lstStyle/>
@@ -8618,6 +11493,7 @@
           <a:lstStyle/>
           <a:p>
             <a:pPr algn="ctr"/>
+            <a:endParaRPr/>
           </a:p>
         </p:txBody>
       </p:sp>
@@ -8664,6 +11540,7 @@
           <a:lstStyle/>
           <a:p>
             <a:pPr algn="ctr"/>
+            <a:endParaRPr/>
           </a:p>
         </p:txBody>
       </p:sp>
@@ -8684,7 +11561,7 @@
           <a:noFill/>
         </p:spPr>
         <p:txBody>
-          <a:bodyPr wrap="square" anchor="ctr" lIns="54864" rIns="54864" tIns="0" bIns="0">
+          <a:bodyPr wrap="square" lIns="54864" tIns="0" rIns="54864" bIns="0" anchor="ctr">
             <a:spAutoFit/>
           </a:bodyPr>
           <a:lstStyle/>
@@ -8747,6 +11624,7 @@
           <a:lstStyle/>
           <a:p>
             <a:pPr algn="ctr"/>
+            <a:endParaRPr/>
           </a:p>
         </p:txBody>
       </p:sp>
@@ -8793,6 +11671,7 @@
           <a:lstStyle/>
           <a:p>
             <a:pPr algn="ctr"/>
+            <a:endParaRPr/>
           </a:p>
         </p:txBody>
       </p:sp>
@@ -8835,7 +11714,7 @@
           </a:fontRef>
         </p:style>
         <p:txBody>
-          <a:bodyPr rtlCol="0" anchor="ctr" wrap="square" lIns="128016" rIns="128016" tIns="0" bIns="0"/>
+          <a:bodyPr wrap="square" lIns="128016" tIns="0" rIns="128016" bIns="0" rtlCol="0" anchor="ctr"/>
           <a:lstStyle/>
           <a:p>
             <a:pPr algn="l"/>
@@ -8927,7 +11806,7 @@
           </a:fontRef>
         </p:style>
         <p:txBody>
-          <a:bodyPr rtlCol="0" anchor="ctr" wrap="square" lIns="128016" rIns="128016" tIns="0" bIns="0"/>
+          <a:bodyPr wrap="square" lIns="128016" tIns="0" rIns="128016" bIns="0" rtlCol="0" anchor="ctr"/>
           <a:lstStyle/>
           <a:p>
             <a:pPr algn="l"/>
@@ -9033,7 +11912,7 @@
           </a:fontRef>
         </p:style>
         <p:txBody>
-          <a:bodyPr rtlCol="0" anchor="ctr" wrap="square" lIns="128016" rIns="128016" tIns="0" bIns="0"/>
+          <a:bodyPr wrap="square" lIns="128016" tIns="0" rIns="128016" bIns="0" rtlCol="0" anchor="ctr"/>
           <a:lstStyle/>
           <a:p>
             <a:pPr algn="l"/>
@@ -9125,7 +12004,7 @@
           </a:fontRef>
         </p:style>
         <p:txBody>
-          <a:bodyPr rtlCol="0" anchor="ctr" wrap="square" lIns="128016" rIns="128016" tIns="0" bIns="0"/>
+          <a:bodyPr wrap="square" lIns="128016" tIns="0" rIns="128016" bIns="0" rtlCol="0" anchor="ctr"/>
           <a:lstStyle/>
           <a:p>
             <a:pPr algn="l"/>
@@ -9217,7 +12096,7 @@
           </a:fontRef>
         </p:style>
         <p:txBody>
-          <a:bodyPr rtlCol="0" anchor="ctr" wrap="square" lIns="128016" rIns="128016" tIns="0" bIns="0"/>
+          <a:bodyPr wrap="square" lIns="128016" tIns="0" rIns="128016" bIns="0" rtlCol="0" anchor="ctr"/>
           <a:lstStyle/>
           <a:p>
             <a:pPr algn="l"/>
@@ -9309,7 +12188,7 @@
           </a:fontRef>
         </p:style>
         <p:txBody>
-          <a:bodyPr rtlCol="0" anchor="ctr" wrap="square" lIns="128016" rIns="128016" tIns="0" bIns="0"/>
+          <a:bodyPr wrap="square" lIns="128016" tIns="0" rIns="128016" bIns="0" rtlCol="0" anchor="ctr"/>
           <a:lstStyle/>
           <a:p>
             <a:pPr algn="l"/>
@@ -9376,119 +12255,6 @@
           </a:fontRef>
         </p:style>
       </p:cxnSp>
-      <p:sp>
-        <p:nvSpPr>
-          <p:cNvPr id="189" name="Rounded Rectangle 188"/>
-          <p:cNvSpPr/>
-          <p:nvPr/>
-        </p:nvSpPr>
-        <p:spPr>
-          <a:xfrm>
-            <a:off x="841248" y="2395728"/>
-            <a:ext cx="3154680" cy="2103120"/>
-          </a:xfrm>
-          <a:prstGeom prst="roundRect">
-            <a:avLst>
-              <a:gd name="adj" fmla="val 12000"/>
-            </a:avLst>
-          </a:prstGeom>
-          <a:solidFill>
-            <a:srgbClr val="FBEAEA"/>
-          </a:solidFill>
-          <a:ln>
-            <a:noFill/>
-          </a:ln>
-          <a:effectLst/>
-        </p:spPr>
-        <p:style>
-          <a:lnRef idx="1">
-            <a:schemeClr val="accent1"/>
-          </a:lnRef>
-          <a:fillRef idx="3">
-            <a:schemeClr val="accent1"/>
-          </a:fillRef>
-          <a:effectRef idx="2">
-            <a:schemeClr val="accent1"/>
-          </a:effectRef>
-          <a:fontRef idx="minor">
-            <a:schemeClr val="lt1"/>
-          </a:fontRef>
-        </p:style>
-        <p:txBody>
-          <a:bodyPr rtlCol="0" anchor="ctr" wrap="square" lIns="182880" rIns="182880" tIns="0" bIns="0"/>
-          <a:lstStyle/>
-          <a:p>
-            <a:pPr algn="l"/>
-            <a:r>
-              <a:rPr sz="1700" b="1">
-                <a:solidFill>
-                  <a:srgbClr val="C00000"/>
-                </a:solidFill>
-                <a:latin typeface="Malgun Gothic"/>
-                <a:ea typeface="Malgun Gothic"/>
-                <a:cs typeface="Malgun Gothic"/>
-              </a:rPr>
-              <a:t>⚠ 센서 전원</a:t>
-            </a:r>
-          </a:p>
-          <a:p>
-            <a:pPr algn="l"/>
-            <a:r>
-              <a:rPr sz="1500" b="0">
-                <a:solidFill>
-                  <a:srgbClr val="262626"/>
-                </a:solidFill>
-                <a:latin typeface="Malgun Gothic"/>
-                <a:ea typeface="Malgun Gothic"/>
-                <a:cs typeface="Malgun Gothic"/>
-              </a:rPr>
-              <a:t>HC-SR04 는 보통 5 V 필요</a:t>
-            </a:r>
-          </a:p>
-          <a:p>
-            <a:pPr algn="l"/>
-            <a:r>
-              <a:rPr sz="1500" b="0">
-                <a:solidFill>
-                  <a:srgbClr val="262626"/>
-                </a:solidFill>
-                <a:latin typeface="Malgun Gothic"/>
-                <a:ea typeface="Malgun Gothic"/>
-                <a:cs typeface="Malgun Gothic"/>
-              </a:rPr>
-              <a:t>(Pmod PWR 는 3.3 V)</a:t>
-            </a:r>
-          </a:p>
-          <a:p>
-            <a:pPr algn="l"/>
-            <a:r>
-              <a:rPr sz="1500" b="0">
-                <a:solidFill>
-                  <a:srgbClr val="262626"/>
-                </a:solidFill>
-                <a:latin typeface="Malgun Gothic"/>
-                <a:ea typeface="Malgun Gothic"/>
-                <a:cs typeface="Malgun Gothic"/>
-              </a:rPr>
-              <a:t>→ 팀원 단독 테스트 때 쓴</a:t>
-            </a:r>
-          </a:p>
-          <a:p>
-            <a:pPr algn="l"/>
-            <a:r>
-              <a:rPr sz="1500" b="0">
-                <a:solidFill>
-                  <a:srgbClr val="262626"/>
-                </a:solidFill>
-                <a:latin typeface="Malgun Gothic"/>
-                <a:ea typeface="Malgun Gothic"/>
-                <a:cs typeface="Malgun Gothic"/>
-              </a:rPr>
-              <a:t>    전원 연결 그대로 사용</a:t>
-            </a:r>
-          </a:p>
-        </p:txBody>
-      </p:sp>
       <p:sp>
         <p:nvSpPr>
           <p:cNvPr id="190" name="Rectangle 189"/>
@@ -9532,6 +12298,7 @@
           <a:lstStyle/>
           <a:p>
             <a:pPr algn="ctr"/>
+            <a:endParaRPr/>
           </a:p>
         </p:txBody>
       </p:sp>
@@ -9552,7 +12319,7 @@
           <a:noFill/>
         </p:spPr>
         <p:txBody>
-          <a:bodyPr wrap="square" anchor="t" lIns="0" rIns="0" tIns="0" bIns="0">
+          <a:bodyPr wrap="square" lIns="0" tIns="0" rIns="0" bIns="0" anchor="t">
             <a:spAutoFit/>
           </a:bodyPr>
           <a:lstStyle/>
@@ -9717,6 +12484,7 @@
           <a:lstStyle/>
           <a:p>
             <a:pPr algn="ctr"/>
+            <a:endParaRPr/>
           </a:p>
         </p:txBody>
       </p:sp>
@@ -9737,7 +12505,7 @@
           <a:noFill/>
         </p:spPr>
         <p:txBody>
-          <a:bodyPr wrap="square" anchor="t" lIns="0" rIns="0" tIns="0" bIns="0">
+          <a:bodyPr wrap="square" lIns="0" tIns="0" rIns="0" bIns="0" anchor="t">
             <a:spAutoFit/>
           </a:bodyPr>
           <a:lstStyle/>
@@ -9847,6 +12615,7 @@
           <a:lstStyle/>
           <a:p>
             <a:pPr algn="ctr"/>
+            <a:endParaRPr/>
           </a:p>
         </p:txBody>
       </p:sp>
@@ -9867,7 +12636,7 @@
           <a:noFill/>
         </p:spPr>
         <p:txBody>
-          <a:bodyPr wrap="square" anchor="t" lIns="0" rIns="0" tIns="0" bIns="0">
+          <a:bodyPr wrap="square" lIns="0" tIns="0" rIns="0" bIns="0" anchor="t">
             <a:spAutoFit/>
           </a:bodyPr>
           <a:lstStyle/>
@@ -9941,6 +12710,7 @@
           <a:lstStyle/>
           <a:p>
             <a:pPr algn="ctr"/>
+            <a:endParaRPr/>
           </a:p>
         </p:txBody>
       </p:sp>
@@ -9961,7 +12731,7 @@
           <a:noFill/>
         </p:spPr>
         <p:txBody>
-          <a:bodyPr wrap="square" anchor="t" lIns="0" rIns="0" tIns="0" bIns="0">
+          <a:bodyPr wrap="square" lIns="0" tIns="0" rIns="0" bIns="0" anchor="t">
             <a:spAutoFit/>
           </a:bodyPr>
           <a:lstStyle/>
@@ -10049,6 +12819,7 @@
           <a:lstStyle/>
           <a:p>
             <a:pPr algn="ctr"/>
+            <a:endParaRPr/>
           </a:p>
         </p:txBody>
       </p:sp>
@@ -10091,7 +12862,7 @@
           </a:fontRef>
         </p:style>
         <p:txBody>
-          <a:bodyPr rtlCol="0" anchor="ctr" wrap="square" lIns="128016" rIns="128016" tIns="0" bIns="0"/>
+          <a:bodyPr wrap="square" lIns="128016" tIns="0" rIns="128016" bIns="0" rtlCol="0" anchor="ctr"/>
           <a:lstStyle/>
           <a:p>
             <a:pPr algn="l"/>
@@ -10199,6 +12970,7 @@
           <a:lstStyle/>
           <a:p>
             <a:pPr algn="ctr"/>
+            <a:endParaRPr/>
           </a:p>
         </p:txBody>
       </p:sp>
@@ -10241,7 +13013,7 @@
           </a:fontRef>
         </p:style>
         <p:txBody>
-          <a:bodyPr rtlCol="0" anchor="ctr" wrap="square" lIns="128016" rIns="128016" tIns="0" bIns="0"/>
+          <a:bodyPr wrap="square" lIns="128016" tIns="0" rIns="128016" bIns="0" rtlCol="0" anchor="ctr"/>
           <a:lstStyle/>
           <a:p>
             <a:pPr algn="l"/>
@@ -10335,6 +13107,7 @@
           <a:lstStyle/>
           <a:p>
             <a:pPr algn="ctr"/>
+            <a:endParaRPr/>
           </a:p>
         </p:txBody>
       </p:sp>
@@ -10377,7 +13150,7 @@
           </a:fontRef>
         </p:style>
         <p:txBody>
-          <a:bodyPr rtlCol="0" anchor="ctr" wrap="square" lIns="128016" rIns="128016" tIns="0" bIns="0"/>
+          <a:bodyPr wrap="square" lIns="128016" tIns="0" rIns="128016" bIns="0" rtlCol="0" anchor="ctr"/>
           <a:lstStyle/>
           <a:p>
             <a:pPr algn="l"/>
@@ -10471,6 +13244,7 @@
           <a:lstStyle/>
           <a:p>
             <a:pPr algn="ctr"/>
+            <a:endParaRPr/>
           </a:p>
         </p:txBody>
       </p:sp>
@@ -10513,7 +13287,7 @@
           </a:fontRef>
         </p:style>
         <p:txBody>
-          <a:bodyPr rtlCol="0" anchor="ctr" wrap="square" lIns="128016" rIns="128016" tIns="0" bIns="0"/>
+          <a:bodyPr wrap="square" lIns="128016" tIns="0" rIns="128016" bIns="0" rtlCol="0" anchor="ctr"/>
           <a:lstStyle/>
           <a:p>
             <a:pPr algn="l"/>
@@ -10607,6 +13381,7 @@
           <a:lstStyle/>
           <a:p>
             <a:pPr algn="ctr"/>
+            <a:endParaRPr/>
           </a:p>
         </p:txBody>
       </p:sp>
@@ -10649,7 +13424,7 @@
           </a:fontRef>
         </p:style>
         <p:txBody>
-          <a:bodyPr rtlCol="0" anchor="ctr" wrap="square" lIns="128016" rIns="128016" tIns="0" bIns="0"/>
+          <a:bodyPr wrap="square" lIns="128016" tIns="0" rIns="128016" bIns="0" rtlCol="0" anchor="ctr"/>
           <a:lstStyle/>
           <a:p>
             <a:pPr algn="l"/>
@@ -10743,6 +13518,7 @@
           <a:lstStyle/>
           <a:p>
             <a:pPr algn="ctr"/>
+            <a:endParaRPr/>
           </a:p>
         </p:txBody>
       </p:sp>
@@ -10785,7 +13561,7 @@
           </a:fontRef>
         </p:style>
         <p:txBody>
-          <a:bodyPr rtlCol="0" anchor="ctr" wrap="square" lIns="128016" rIns="128016" tIns="0" bIns="0"/>
+          <a:bodyPr wrap="square" lIns="128016" tIns="0" rIns="128016" bIns="0" rtlCol="0" anchor="ctr"/>
           <a:lstStyle/>
           <a:p>
             <a:pPr algn="l"/>
@@ -10877,7 +13653,7 @@
           </a:fontRef>
         </p:style>
         <p:txBody>
-          <a:bodyPr rtlCol="0" anchor="ctr" wrap="square" lIns="0" rIns="0" tIns="0" bIns="0"/>
+          <a:bodyPr wrap="square" lIns="0" tIns="0" rIns="0" bIns="0" rtlCol="0" anchor="ctr"/>
           <a:lstStyle/>
           <a:p>
             <a:pPr algn="ctr"/>
@@ -10934,7 +13710,7 @@
           </a:fontRef>
         </p:style>
         <p:txBody>
-          <a:bodyPr rtlCol="0" anchor="ctr" wrap="square" lIns="0" rIns="0" tIns="0" bIns="0"/>
+          <a:bodyPr wrap="square" lIns="0" tIns="0" rIns="0" bIns="0" rtlCol="0" anchor="ctr"/>
           <a:lstStyle/>
           <a:p>
             <a:pPr algn="ctr"/>
@@ -10995,6 +13771,7 @@
           <a:lstStyle/>
           <a:p>
             <a:pPr algn="ctr"/>
+            <a:endParaRPr/>
           </a:p>
         </p:txBody>
       </p:sp>
@@ -11015,7 +13792,7 @@
           <a:noFill/>
         </p:spPr>
         <p:txBody>
-          <a:bodyPr wrap="square" anchor="ctr" lIns="0" rIns="0" tIns="0" bIns="0">
+          <a:bodyPr wrap="square" lIns="0" tIns="0" rIns="0" bIns="0" anchor="ctr">
             <a:spAutoFit/>
           </a:bodyPr>
           <a:lstStyle/>
@@ -11078,6 +13855,7 @@
           <a:lstStyle/>
           <a:p>
             <a:pPr algn="ctr"/>
+            <a:endParaRPr/>
           </a:p>
         </p:txBody>
       </p:sp>
@@ -11098,7 +13876,7 @@
           <a:noFill/>
         </p:spPr>
         <p:txBody>
-          <a:bodyPr wrap="square" anchor="ctr" lIns="0" rIns="0" tIns="0" bIns="0">
+          <a:bodyPr wrap="square" lIns="0" tIns="0" rIns="0" bIns="0" anchor="ctr">
             <a:spAutoFit/>
           </a:bodyPr>
           <a:lstStyle/>
@@ -11161,6 +13939,7 @@
           <a:lstStyle/>
           <a:p>
             <a:pPr algn="ctr"/>
+            <a:endParaRPr/>
           </a:p>
         </p:txBody>
       </p:sp>
@@ -11181,7 +13960,7 @@
           <a:noFill/>
         </p:spPr>
         <p:txBody>
-          <a:bodyPr wrap="square" anchor="ctr" lIns="0" rIns="0" tIns="0" bIns="0">
+          <a:bodyPr wrap="square" lIns="0" tIns="0" rIns="0" bIns="0" anchor="ctr">
             <a:spAutoFit/>
           </a:bodyPr>
           <a:lstStyle/>
@@ -11244,6 +14023,7 @@
           <a:lstStyle/>
           <a:p>
             <a:pPr algn="ctr"/>
+            <a:endParaRPr/>
           </a:p>
         </p:txBody>
       </p:sp>
@@ -11264,7 +14044,7 @@
           <a:noFill/>
         </p:spPr>
         <p:txBody>
-          <a:bodyPr wrap="square" anchor="ctr" lIns="0" rIns="0" tIns="0" bIns="0">
+          <a:bodyPr wrap="square" lIns="0" tIns="0" rIns="0" bIns="0" anchor="ctr">
             <a:spAutoFit/>
           </a:bodyPr>
           <a:lstStyle/>
@@ -11327,6 +14107,7 @@
           <a:lstStyle/>
           <a:p>
             <a:pPr algn="ctr"/>
+            <a:endParaRPr/>
           </a:p>
         </p:txBody>
       </p:sp>
@@ -11347,7 +14128,7 @@
           <a:noFill/>
         </p:spPr>
         <p:txBody>
-          <a:bodyPr wrap="square" anchor="ctr" lIns="0" rIns="0" tIns="0" bIns="0">
+          <a:bodyPr wrap="square" lIns="0" tIns="0" rIns="0" bIns="0" anchor="ctr">
             <a:spAutoFit/>
           </a:bodyPr>
           <a:lstStyle/>
@@ -11410,6 +14191,7 @@
           <a:lstStyle/>
           <a:p>
             <a:pPr algn="ctr"/>
+            <a:endParaRPr/>
           </a:p>
         </p:txBody>
       </p:sp>
@@ -11430,7 +14212,7 @@
           <a:noFill/>
         </p:spPr>
         <p:txBody>
-          <a:bodyPr wrap="square" anchor="ctr" lIns="0" rIns="0" tIns="0" bIns="0">
+          <a:bodyPr wrap="square" lIns="0" tIns="0" rIns="0" bIns="0" anchor="ctr">
             <a:spAutoFit/>
           </a:bodyPr>
           <a:lstStyle/>
@@ -11493,6 +14275,7 @@
           <a:lstStyle/>
           <a:p>
             <a:pPr algn="ctr"/>
+            <a:endParaRPr/>
           </a:p>
         </p:txBody>
       </p:sp>
@@ -11513,7 +14296,7 @@
           <a:noFill/>
         </p:spPr>
         <p:txBody>
-          <a:bodyPr wrap="square" anchor="ctr" lIns="0" rIns="0" tIns="0" bIns="0">
+          <a:bodyPr wrap="square" lIns="0" tIns="0" rIns="0" bIns="0" anchor="ctr">
             <a:spAutoFit/>
           </a:bodyPr>
           <a:lstStyle/>
@@ -11576,6 +14359,7 @@
           <a:lstStyle/>
           <a:p>
             <a:pPr algn="ctr"/>
+            <a:endParaRPr/>
           </a:p>
         </p:txBody>
       </p:sp>
@@ -11596,7 +14380,7 @@
           <a:noFill/>
         </p:spPr>
         <p:txBody>
-          <a:bodyPr wrap="square" anchor="ctr" lIns="0" rIns="0" tIns="0" bIns="0">
+          <a:bodyPr wrap="square" lIns="0" tIns="0" rIns="0" bIns="0" anchor="ctr">
             <a:spAutoFit/>
           </a:bodyPr>
           <a:lstStyle/>
@@ -11633,7 +14417,7 @@
           <a:noFill/>
         </p:spPr>
         <p:txBody>
-          <a:bodyPr wrap="square" anchor="ctr" lIns="0" rIns="0" tIns="0" bIns="0">
+          <a:bodyPr wrap="square" lIns="0" tIns="0" rIns="0" bIns="0" anchor="ctr">
             <a:spAutoFit/>
           </a:bodyPr>
           <a:lstStyle/>
@@ -11675,7 +14459,7 @@
 </p:sld>
 </file>
 
-<file path=ppt/slides/slide4.xml><?xml version="1.0" encoding="utf-8"?>
+<file path=ppt/slides/slide5.xml><?xml version="1.0" encoding="utf-8"?>
 <p:sld xmlns:a="http://schemas.openxmlformats.org/drawingml/2006/main" xmlns:r="http://schemas.openxmlformats.org/officeDocument/2006/relationships" xmlns:p="http://schemas.openxmlformats.org/presentationml/2006/main">
   <p:cSld>
     <p:spTree>
@@ -20343,7 +23127,7 @@
               <a:buSzPts val="900"/>
             </a:pPr>
             <a:r>
-              <a:rPr lang="en-US" altLang="ko" b="1" sz="1800">
+              <a:rPr lang="en-US" altLang="ko" sz="1800" b="1">
                 <a:solidFill>
                   <a:srgbClr val="C05621"/>
                 </a:solidFill>
@@ -20355,7 +23139,7 @@
               <a:t>※ </a:t>
             </a:r>
             <a:r>
-              <a:rPr lang="en-US" altLang="ko" b="1" sz="1800">
+              <a:rPr lang="en-US" altLang="ko" sz="1800" b="1">
                 <a:solidFill>
                   <a:srgbClr val="262626"/>
                 </a:solidFill>
@@ -20379,7 +23163,7 @@
               <a:t> · </a:t>
             </a:r>
             <a:r>
-              <a:rPr lang="en-US" altLang="ko" b="1" sz="1800">
+              <a:rPr lang="en-US" altLang="ko" sz="1800" b="1">
                 <a:solidFill>
                   <a:srgbClr val="262626"/>
                 </a:solidFill>
@@ -20403,7 +23187,7 @@
               <a:t> 는 </a:t>
             </a:r>
             <a:r>
-              <a:rPr lang="en-US" altLang="ko" b="1" sz="1800">
+              <a:rPr lang="en-US" altLang="ko" sz="1800" b="1">
                 <a:solidFill>
                   <a:srgbClr val="262626"/>
                 </a:solidFill>
@@ -20444,7 +23228,7 @@
               <a:buSzPts val="900"/>
             </a:pPr>
             <a:r>
-              <a:rPr lang="en-US" altLang="ko" b="1" sz="1800">
+              <a:rPr lang="en-US" altLang="ko" sz="1800" b="1">
                 <a:solidFill>
                   <a:srgbClr val="C05621"/>
                 </a:solidFill>
@@ -20456,7 +23240,7 @@
               <a:t>※ </a:t>
             </a:r>
             <a:r>
-              <a:rPr lang="en-US" altLang="ko" b="1" sz="1800">
+              <a:rPr lang="en-US" altLang="ko" sz="1800" b="1">
                 <a:solidFill>
                   <a:srgbClr val="262626"/>
                 </a:solidFill>
@@ -21172,7 +23956,7 @@
                 <a:ea typeface="Malgun Gothic"/>
                 <a:cs typeface="Malgun Gothic"/>
               </a:rPr>
-              <a:t>04</a:t>
+              <a:t>05</a:t>
             </a:r>
             <a:endParaRPr lang="ko-KR" sz="1100" dirty="0"/>
           </a:p>

--- a/FINAL/ppt/FINAL_presentation.pptx
+++ b/FINAL/ppt/FINAL_presentation.pptx
@@ -5,14 +5,14 @@
     <p:sldMasterId id="2147483648" r:id="rId1"/>
   </p:sldMasterIdLst>
   <p:notesMasterIdLst>
-    <p:notesMasterId r:id="rId6"/>
+    <p:notesMasterId r:id="rId7"/>
   </p:notesMasterIdLst>
   <p:sldIdLst>
     <p:sldId id="256" r:id="rId2"/>
     <p:sldId id="257" r:id="rId3"/>
-    <p:sldId id="260" r:id="rId11"/>
-    <p:sldId id="258" r:id="rId4"/>
-    <p:sldId id="259" r:id="rId5"/>
+    <p:sldId id="260" r:id="rId4"/>
+    <p:sldId id="258" r:id="rId5"/>
+    <p:sldId id="259" r:id="rId6"/>
   </p:sldIdLst>
   <p:sldSz cx="18288000" cy="10287000"/>
   <p:notesSz cx="6858000" cy="9144000"/>
@@ -640,7 +640,7 @@
             </a:pPr>
             <a:fld id="{00000000-1234-1234-1234-123412341234}" type="slidenum">
               <a:rPr lang="en-US" altLang="ko"/>
-              <a:t>3</a:t>
+              <a:t>4</a:t>
             </a:fld>
             <a:endParaRPr/>
           </a:p>
@@ -815,7 +815,7 @@
             </a:pPr>
             <a:fld id="{00000000-1234-1234-1234-123412341234}" type="slidenum">
               <a:rPr lang="en-US" altLang="ko"/>
-              <a:t>4</a:t>
+              <a:t>5</a:t>
             </a:fld>
             <a:endParaRPr/>
           </a:p>
@@ -6211,7 +6211,7 @@
 </file>
 
 <file path=ppt/slides/slide3.xml><?xml version="1.0" encoding="utf-8"?>
-<p:sld xmlns:a="http://schemas.openxmlformats.org/drawingml/2006/main" xmlns:p="http://schemas.openxmlformats.org/presentationml/2006/main" xmlns:r="http://schemas.openxmlformats.org/officeDocument/2006/relationships">
+<p:sld xmlns:a="http://schemas.openxmlformats.org/drawingml/2006/main" xmlns:r="http://schemas.openxmlformats.org/officeDocument/2006/relationships" xmlns:p="http://schemas.openxmlformats.org/presentationml/2006/main">
   <p:cSld>
     <p:spTree>
       <p:nvGrpSpPr>
@@ -6219,7 +6219,14 @@
         <p:cNvGrpSpPr/>
         <p:nvPr/>
       </p:nvGrpSpPr>
-      <p:grpSpPr/>
+      <p:grpSpPr>
+        <a:xfrm>
+          <a:off x="0" y="0"/>
+          <a:ext cx="0" cy="0"/>
+          <a:chOff x="0" y="0"/>
+          <a:chExt cx="0" cy="0"/>
+        </a:xfrm>
+      </p:grpSpPr>
       <p:sp>
         <p:nvSpPr>
           <p:cNvPr id="120" name="text"/>
@@ -6590,6 +6597,7 @@
           <a:lstStyle/>
           <a:p>
             <a:pPr algn="ctr"/>
+            <a:endParaRPr/>
           </a:p>
         </p:txBody>
       </p:sp>
@@ -6610,7 +6618,7 @@
           <a:noFill/>
         </p:spPr>
         <p:txBody>
-          <a:bodyPr wrap="square" anchor="ctr" lIns="0" rIns="0" tIns="0" bIns="0">
+          <a:bodyPr wrap="square" lIns="0" tIns="0" rIns="0" bIns="0" anchor="ctr">
             <a:spAutoFit/>
           </a:bodyPr>
           <a:lstStyle/>
@@ -6680,21 +6688,11 @@
           </a:fontRef>
         </p:style>
         <p:txBody>
-          <a:bodyPr rtlCol="0" anchor="ctr" wrap="square" lIns="0" rIns="0" tIns="0" bIns="0"/>
+          <a:bodyPr wrap="square" lIns="0" tIns="0" rIns="0" bIns="0" rtlCol="0" anchor="ctr"/>
           <a:lstStyle/>
           <a:p>
             <a:pPr algn="l"/>
-            <a:r>
-              <a:rPr sz="1000" b="0">
-                <a:solidFill>
-                  <a:srgbClr val="262626"/>
-                </a:solidFill>
-                <a:latin typeface="Malgun Gothic"/>
-                <a:ea typeface="Malgun Gothic"/>
-                <a:cs typeface="Malgun Gothic"/>
-              </a:rPr>
-              <a:t/>
-            </a:r>
+            <a:endParaRPr/>
           </a:p>
         </p:txBody>
       </p:sp>
@@ -6735,7 +6733,7 @@
           </a:fontRef>
         </p:style>
         <p:txBody>
-          <a:bodyPr rtlCol="0" anchor="ctr" wrap="square" lIns="0" rIns="0" tIns="0" bIns="0"/>
+          <a:bodyPr wrap="square" lIns="0" tIns="0" rIns="0" bIns="0" rtlCol="0" anchor="ctr"/>
           <a:lstStyle/>
           <a:p>
             <a:pPr algn="ctr"/>
@@ -6770,7 +6768,7 @@
           <a:noFill/>
         </p:spPr>
         <p:txBody>
-          <a:bodyPr wrap="square" anchor="ctr" lIns="0" rIns="0" tIns="0" bIns="0">
+          <a:bodyPr wrap="square" lIns="0" tIns="0" rIns="0" bIns="0" anchor="ctr">
             <a:spAutoFit/>
           </a:bodyPr>
           <a:lstStyle/>
@@ -6807,7 +6805,7 @@
           <a:noFill/>
         </p:spPr>
         <p:txBody>
-          <a:bodyPr wrap="square" anchor="t" lIns="0" rIns="0" tIns="0" bIns="0">
+          <a:bodyPr wrap="square" lIns="0" tIns="0" rIns="0" bIns="0" anchor="t">
             <a:spAutoFit/>
           </a:bodyPr>
           <a:lstStyle/>
@@ -6858,7 +6856,7 @@
           <a:noFill/>
         </p:spPr>
         <p:txBody>
-          <a:bodyPr wrap="square" anchor="ctr" lIns="0" rIns="0" tIns="0" bIns="0">
+          <a:bodyPr wrap="square" lIns="0" tIns="0" rIns="0" bIns="0" anchor="ctr">
             <a:spAutoFit/>
           </a:bodyPr>
           <a:lstStyle/>
@@ -6895,7 +6893,7 @@
           <a:noFill/>
         </p:spPr>
         <p:txBody>
-          <a:bodyPr wrap="square" anchor="ctr" lIns="0" rIns="0" tIns="0" bIns="0">
+          <a:bodyPr wrap="square" lIns="0" tIns="0" rIns="0" bIns="0" anchor="ctr">
             <a:spAutoFit/>
           </a:bodyPr>
           <a:lstStyle/>
@@ -6954,21 +6952,11 @@
           </a:fontRef>
         </p:style>
         <p:txBody>
-          <a:bodyPr rtlCol="0" anchor="ctr" wrap="square" lIns="0" rIns="0" tIns="0" bIns="0"/>
+          <a:bodyPr wrap="square" lIns="0" tIns="0" rIns="0" bIns="0" rtlCol="0" anchor="ctr"/>
           <a:lstStyle/>
           <a:p>
             <a:pPr algn="l"/>
-            <a:r>
-              <a:rPr sz="1000" b="0">
-                <a:solidFill>
-                  <a:srgbClr val="262626"/>
-                </a:solidFill>
-                <a:latin typeface="Malgun Gothic"/>
-                <a:ea typeface="Malgun Gothic"/>
-                <a:cs typeface="Malgun Gothic"/>
-              </a:rPr>
-              <a:t/>
-            </a:r>
+            <a:endParaRPr/>
           </a:p>
         </p:txBody>
       </p:sp>
@@ -7009,7 +6997,7 @@
           </a:fontRef>
         </p:style>
         <p:txBody>
-          <a:bodyPr rtlCol="0" anchor="ctr" wrap="square" lIns="0" rIns="0" tIns="0" bIns="0"/>
+          <a:bodyPr wrap="square" lIns="0" tIns="0" rIns="0" bIns="0" rtlCol="0" anchor="ctr"/>
           <a:lstStyle/>
           <a:p>
             <a:pPr algn="ctr"/>
@@ -7044,7 +7032,7 @@
           <a:noFill/>
         </p:spPr>
         <p:txBody>
-          <a:bodyPr wrap="square" anchor="ctr" lIns="0" rIns="0" tIns="0" bIns="0">
+          <a:bodyPr wrap="square" lIns="0" tIns="0" rIns="0" bIns="0" anchor="ctr">
             <a:spAutoFit/>
           </a:bodyPr>
           <a:lstStyle/>
@@ -7081,7 +7069,7 @@
           <a:noFill/>
         </p:spPr>
         <p:txBody>
-          <a:bodyPr wrap="square" anchor="t" lIns="0" rIns="0" tIns="0" bIns="0">
+          <a:bodyPr wrap="square" lIns="0" tIns="0" rIns="0" bIns="0" anchor="t">
             <a:spAutoFit/>
           </a:bodyPr>
           <a:lstStyle/>
@@ -7132,7 +7120,7 @@
           <a:noFill/>
         </p:spPr>
         <p:txBody>
-          <a:bodyPr wrap="square" anchor="ctr" lIns="0" rIns="0" tIns="0" bIns="0">
+          <a:bodyPr wrap="square" lIns="0" tIns="0" rIns="0" bIns="0" anchor="ctr">
             <a:spAutoFit/>
           </a:bodyPr>
           <a:lstStyle/>
@@ -7169,7 +7157,7 @@
           <a:noFill/>
         </p:spPr>
         <p:txBody>
-          <a:bodyPr wrap="square" anchor="ctr" lIns="0" rIns="0" tIns="0" bIns="0">
+          <a:bodyPr wrap="square" lIns="0" tIns="0" rIns="0" bIns="0" anchor="ctr">
             <a:spAutoFit/>
           </a:bodyPr>
           <a:lstStyle/>
@@ -7228,21 +7216,11 @@
           </a:fontRef>
         </p:style>
         <p:txBody>
-          <a:bodyPr rtlCol="0" anchor="ctr" wrap="square" lIns="0" rIns="0" tIns="0" bIns="0"/>
+          <a:bodyPr wrap="square" lIns="0" tIns="0" rIns="0" bIns="0" rtlCol="0" anchor="ctr"/>
           <a:lstStyle/>
           <a:p>
             <a:pPr algn="l"/>
-            <a:r>
-              <a:rPr sz="1000" b="0">
-                <a:solidFill>
-                  <a:srgbClr val="262626"/>
-                </a:solidFill>
-                <a:latin typeface="Malgun Gothic"/>
-                <a:ea typeface="Malgun Gothic"/>
-                <a:cs typeface="Malgun Gothic"/>
-              </a:rPr>
-              <a:t/>
-            </a:r>
+            <a:endParaRPr/>
           </a:p>
         </p:txBody>
       </p:sp>
@@ -7283,7 +7261,7 @@
           </a:fontRef>
         </p:style>
         <p:txBody>
-          <a:bodyPr rtlCol="0" anchor="ctr" wrap="square" lIns="0" rIns="0" tIns="0" bIns="0"/>
+          <a:bodyPr wrap="square" lIns="0" tIns="0" rIns="0" bIns="0" rtlCol="0" anchor="ctr"/>
           <a:lstStyle/>
           <a:p>
             <a:pPr algn="ctr"/>
@@ -7318,7 +7296,7 @@
           <a:noFill/>
         </p:spPr>
         <p:txBody>
-          <a:bodyPr wrap="square" anchor="ctr" lIns="0" rIns="0" tIns="0" bIns="0">
+          <a:bodyPr wrap="square" lIns="0" tIns="0" rIns="0" bIns="0" anchor="ctr">
             <a:spAutoFit/>
           </a:bodyPr>
           <a:lstStyle/>
@@ -7355,7 +7333,7 @@
           <a:noFill/>
         </p:spPr>
         <p:txBody>
-          <a:bodyPr wrap="square" anchor="t" lIns="0" rIns="0" tIns="0" bIns="0">
+          <a:bodyPr wrap="square" lIns="0" tIns="0" rIns="0" bIns="0" anchor="t">
             <a:spAutoFit/>
           </a:bodyPr>
           <a:lstStyle/>
@@ -7406,7 +7384,7 @@
           <a:noFill/>
         </p:spPr>
         <p:txBody>
-          <a:bodyPr wrap="square" anchor="ctr" lIns="0" rIns="0" tIns="0" bIns="0">
+          <a:bodyPr wrap="square" lIns="0" tIns="0" rIns="0" bIns="0" anchor="ctr">
             <a:spAutoFit/>
           </a:bodyPr>
           <a:lstStyle/>
@@ -7443,7 +7421,7 @@
           <a:noFill/>
         </p:spPr>
         <p:txBody>
-          <a:bodyPr wrap="square" anchor="ctr" lIns="0" rIns="0" tIns="0" bIns="0">
+          <a:bodyPr wrap="square" lIns="0" tIns="0" rIns="0" bIns="0" anchor="ctr">
             <a:spAutoFit/>
           </a:bodyPr>
           <a:lstStyle/>
@@ -7502,21 +7480,11 @@
           </a:fontRef>
         </p:style>
         <p:txBody>
-          <a:bodyPr rtlCol="0" anchor="ctr" wrap="square" lIns="0" rIns="0" tIns="0" bIns="0"/>
+          <a:bodyPr wrap="square" lIns="0" tIns="0" rIns="0" bIns="0" rtlCol="0" anchor="ctr"/>
           <a:lstStyle/>
           <a:p>
             <a:pPr algn="l"/>
-            <a:r>
-              <a:rPr sz="1000" b="0">
-                <a:solidFill>
-                  <a:srgbClr val="262626"/>
-                </a:solidFill>
-                <a:latin typeface="Malgun Gothic"/>
-                <a:ea typeface="Malgun Gothic"/>
-                <a:cs typeface="Malgun Gothic"/>
-              </a:rPr>
-              <a:t/>
-            </a:r>
+            <a:endParaRPr/>
           </a:p>
         </p:txBody>
       </p:sp>
@@ -7557,7 +7525,7 @@
           </a:fontRef>
         </p:style>
         <p:txBody>
-          <a:bodyPr rtlCol="0" anchor="ctr" wrap="square" lIns="0" rIns="0" tIns="0" bIns="0"/>
+          <a:bodyPr wrap="square" lIns="0" tIns="0" rIns="0" bIns="0" rtlCol="0" anchor="ctr"/>
           <a:lstStyle/>
           <a:p>
             <a:pPr algn="ctr"/>
@@ -7592,7 +7560,7 @@
           <a:noFill/>
         </p:spPr>
         <p:txBody>
-          <a:bodyPr wrap="square" anchor="ctr" lIns="0" rIns="0" tIns="0" bIns="0">
+          <a:bodyPr wrap="square" lIns="0" tIns="0" rIns="0" bIns="0" anchor="ctr">
             <a:spAutoFit/>
           </a:bodyPr>
           <a:lstStyle/>
@@ -7629,7 +7597,7 @@
           <a:noFill/>
         </p:spPr>
         <p:txBody>
-          <a:bodyPr wrap="square" anchor="t" lIns="0" rIns="0" tIns="0" bIns="0">
+          <a:bodyPr wrap="square" lIns="0" tIns="0" rIns="0" bIns="0" anchor="t">
             <a:spAutoFit/>
           </a:bodyPr>
           <a:lstStyle/>
@@ -7680,7 +7648,7 @@
           <a:noFill/>
         </p:spPr>
         <p:txBody>
-          <a:bodyPr wrap="square" anchor="ctr" lIns="0" rIns="0" tIns="0" bIns="0">
+          <a:bodyPr wrap="square" lIns="0" tIns="0" rIns="0" bIns="0" anchor="ctr">
             <a:spAutoFit/>
           </a:bodyPr>
           <a:lstStyle/>
@@ -7717,7 +7685,7 @@
           <a:noFill/>
         </p:spPr>
         <p:txBody>
-          <a:bodyPr wrap="square" anchor="ctr" lIns="0" rIns="0" tIns="0" bIns="0">
+          <a:bodyPr wrap="square" lIns="0" tIns="0" rIns="0" bIns="0" anchor="ctr">
             <a:spAutoFit/>
           </a:bodyPr>
           <a:lstStyle/>
@@ -7782,6 +7750,7 @@
           <a:lstStyle/>
           <a:p>
             <a:pPr algn="ctr"/>
+            <a:endParaRPr/>
           </a:p>
         </p:txBody>
       </p:sp>
@@ -7802,7 +7771,7 @@
           <a:noFill/>
         </p:spPr>
         <p:txBody>
-          <a:bodyPr wrap="square" anchor="ctr" lIns="0" rIns="0" tIns="0" bIns="0">
+          <a:bodyPr wrap="square" lIns="0" tIns="0" rIns="0" bIns="0" anchor="ctr">
             <a:spAutoFit/>
           </a:bodyPr>
           <a:lstStyle/>
@@ -7875,7 +7844,7 @@
           </a:fontRef>
         </p:style>
         <p:txBody>
-          <a:bodyPr rtlCol="0" anchor="t" wrap="square" lIns="137160" rIns="137160" tIns="182880" bIns="0"/>
+          <a:bodyPr wrap="square" lIns="137160" tIns="182880" rIns="137160" bIns="0" rtlCol="0" anchor="t"/>
           <a:lstStyle/>
           <a:p>
             <a:pPr algn="l">
@@ -8043,7 +8012,7 @@
           </a:fontRef>
         </p:style>
         <p:txBody>
-          <a:bodyPr rtlCol="0" anchor="ctr" wrap="square" lIns="0" rIns="0" tIns="0" bIns="0"/>
+          <a:bodyPr wrap="square" lIns="0" tIns="0" rIns="0" bIns="0" rtlCol="0" anchor="ctr"/>
           <a:lstStyle/>
           <a:p>
             <a:pPr algn="ctr"/>
@@ -8078,7 +8047,7 @@
           <a:noFill/>
         </p:spPr>
         <p:txBody>
-          <a:bodyPr wrap="square" anchor="ctr" lIns="0" rIns="0" tIns="0" bIns="0">
+          <a:bodyPr wrap="square" lIns="0" tIns="0" rIns="0" bIns="0" anchor="ctr">
             <a:spAutoFit/>
           </a:bodyPr>
           <a:lstStyle/>
@@ -8115,7 +8084,7 @@
           <a:noFill/>
         </p:spPr>
         <p:txBody>
-          <a:bodyPr wrap="square" anchor="ctr" lIns="0" rIns="0" tIns="0" bIns="0">
+          <a:bodyPr wrap="square" lIns="0" tIns="0" rIns="0" bIns="0" anchor="ctr">
             <a:spAutoFit/>
           </a:bodyPr>
           <a:lstStyle/>
@@ -8152,7 +8121,7 @@
           <a:noFill/>
         </p:spPr>
         <p:txBody>
-          <a:bodyPr wrap="square" anchor="t" lIns="0" rIns="0" tIns="0" bIns="0">
+          <a:bodyPr wrap="square" lIns="0" tIns="0" rIns="0" bIns="0" anchor="t">
             <a:spAutoFit/>
           </a:bodyPr>
           <a:lstStyle/>
@@ -8245,6 +8214,7 @@
           <a:lstStyle/>
           <a:p>
             <a:pPr algn="ctr"/>
+            <a:endParaRPr/>
           </a:p>
         </p:txBody>
       </p:sp>
@@ -8285,7 +8255,7 @@
           </a:fontRef>
         </p:style>
         <p:txBody>
-          <a:bodyPr rtlCol="0" anchor="ctr" wrap="square" lIns="0" rIns="0" tIns="0" bIns="0"/>
+          <a:bodyPr wrap="square" lIns="0" tIns="0" rIns="0" bIns="0" rtlCol="0" anchor="ctr"/>
           <a:lstStyle/>
           <a:p>
             <a:pPr algn="ctr"/>
@@ -8320,7 +8290,7 @@
           <a:noFill/>
         </p:spPr>
         <p:txBody>
-          <a:bodyPr wrap="square" anchor="ctr" lIns="0" rIns="0" tIns="0" bIns="0">
+          <a:bodyPr wrap="square" lIns="0" tIns="0" rIns="0" bIns="0" anchor="ctr">
             <a:spAutoFit/>
           </a:bodyPr>
           <a:lstStyle/>
@@ -8371,7 +8341,7 @@
           <a:noFill/>
         </p:spPr>
         <p:txBody>
-          <a:bodyPr wrap="square" anchor="t" lIns="0" rIns="0" tIns="0" bIns="0">
+          <a:bodyPr wrap="square" lIns="0" tIns="0" rIns="0" bIns="0" anchor="t">
             <a:spAutoFit/>
           </a:bodyPr>
           <a:lstStyle/>
@@ -8422,7 +8392,7 @@
           <a:noFill/>
         </p:spPr>
         <p:txBody>
-          <a:bodyPr wrap="square" anchor="t" lIns="0" rIns="0" tIns="0" bIns="0">
+          <a:bodyPr wrap="square" lIns="0" tIns="0" rIns="0" bIns="0" anchor="t">
             <a:spAutoFit/>
           </a:bodyPr>
           <a:lstStyle/>
@@ -8487,7 +8457,7 @@
           <a:noFill/>
         </p:spPr>
         <p:txBody>
-          <a:bodyPr wrap="square" anchor="ctr" lIns="0" rIns="0" tIns="0" bIns="0">
+          <a:bodyPr wrap="square" lIns="0" tIns="0" rIns="0" bIns="0" anchor="ctr">
             <a:spAutoFit/>
           </a:bodyPr>
           <a:lstStyle/>
@@ -8572,7 +8542,7 @@
           <a:noFill/>
         </p:spPr>
         <p:txBody>
-          <a:bodyPr wrap="square" anchor="ctr" lIns="0" rIns="0" tIns="0" bIns="0">
+          <a:bodyPr wrap="square" lIns="0" tIns="0" rIns="0" bIns="0" anchor="ctr">
             <a:spAutoFit/>
           </a:bodyPr>
           <a:lstStyle/>
@@ -8646,7 +8616,7 @@
           <a:noFill/>
         </p:spPr>
         <p:txBody>
-          <a:bodyPr wrap="square" anchor="ctr" lIns="0" rIns="0" tIns="0" bIns="0">
+          <a:bodyPr wrap="square" lIns="0" tIns="0" rIns="0" bIns="0" anchor="ctr">
             <a:spAutoFit/>
           </a:bodyPr>
           <a:lstStyle/>
@@ -8705,21 +8675,11 @@
           </a:fontRef>
         </p:style>
         <p:txBody>
-          <a:bodyPr rtlCol="0" anchor="ctr" wrap="square" lIns="0" rIns="0" tIns="0" bIns="0"/>
+          <a:bodyPr wrap="square" lIns="0" tIns="0" rIns="0" bIns="0" rtlCol="0" anchor="ctr"/>
           <a:lstStyle/>
           <a:p>
             <a:pPr algn="l"/>
-            <a:r>
-              <a:rPr sz="1000" b="0">
-                <a:solidFill>
-                  <a:srgbClr val="262626"/>
-                </a:solidFill>
-                <a:latin typeface="Malgun Gothic"/>
-                <a:ea typeface="Malgun Gothic"/>
-                <a:cs typeface="Malgun Gothic"/>
-              </a:rPr>
-              <a:t/>
-            </a:r>
+            <a:endParaRPr/>
           </a:p>
         </p:txBody>
       </p:sp>
@@ -8760,7 +8720,7 @@
           </a:fontRef>
         </p:style>
         <p:txBody>
-          <a:bodyPr rtlCol="0" anchor="ctr" wrap="square" lIns="0" rIns="0" tIns="0" bIns="0"/>
+          <a:bodyPr wrap="square" lIns="0" tIns="0" rIns="0" bIns="0" rtlCol="0" anchor="ctr"/>
           <a:lstStyle/>
           <a:p>
             <a:pPr algn="ctr"/>
@@ -8795,7 +8755,7 @@
           <a:noFill/>
         </p:spPr>
         <p:txBody>
-          <a:bodyPr wrap="square" anchor="ctr" lIns="0" rIns="0" tIns="0" bIns="0">
+          <a:bodyPr wrap="square" lIns="0" tIns="0" rIns="0" bIns="0" anchor="ctr">
             <a:spAutoFit/>
           </a:bodyPr>
           <a:lstStyle/>
@@ -8846,7 +8806,7 @@
           <a:noFill/>
         </p:spPr>
         <p:txBody>
-          <a:bodyPr wrap="square" anchor="ctr" lIns="0" rIns="0" tIns="0" bIns="0">
+          <a:bodyPr wrap="square" lIns="0" tIns="0" rIns="0" bIns="0" anchor="ctr">
             <a:spAutoFit/>
           </a:bodyPr>
           <a:lstStyle/>
@@ -8905,7 +8865,7 @@
           <a:noFill/>
         </p:spPr>
         <p:txBody>
-          <a:bodyPr wrap="square" anchor="ctr" lIns="0" rIns="0" tIns="0" bIns="0">
+          <a:bodyPr wrap="square" lIns="0" tIns="0" rIns="0" bIns="0" anchor="ctr">
             <a:spAutoFit/>
           </a:bodyPr>
           <a:lstStyle/>
@@ -8964,7 +8924,7 @@
           <a:noFill/>
         </p:spPr>
         <p:txBody>
-          <a:bodyPr wrap="square" anchor="ctr" lIns="0" rIns="0" tIns="0" bIns="0">
+          <a:bodyPr wrap="square" lIns="0" tIns="0" rIns="0" bIns="0" anchor="ctr">
             <a:spAutoFit/>
           </a:bodyPr>
           <a:lstStyle/>
@@ -9023,7 +8983,7 @@
           <a:noFill/>
         </p:spPr>
         <p:txBody>
-          <a:bodyPr wrap="square" anchor="ctr" lIns="0" rIns="0" tIns="0" bIns="0">
+          <a:bodyPr wrap="square" lIns="0" tIns="0" rIns="0" bIns="0" anchor="ctr">
             <a:spAutoFit/>
           </a:bodyPr>
           <a:lstStyle/>
